--- a/Curriculo/Fase2_Basico1/decks/Basico1_S03_Kiran.pptx
+++ b/Curriculo/Fase2_Basico1/decks/Basico1_S03_Kiran.pptx
@@ -136,7 +136,7 @@
   <p:extLst>
     <p:ext uri="{521415D9-36F7-43E2-AB2F-B90AF26B5E84}">
       <p14:sectionLst xmlns:p14="http://schemas.microsoft.com/office/powerpoint/2010/main">
-        <p14:section name="Semana 3" id="{09672897-1490-CF4A-7172-15EC95A70B31}">
+        <p14:section name="Semana 3" id="{9732B14D-A20E-277B-CB84-AEDA3E54A9C9}">
           <p14:sldIdLst>
             <p14:sldId id="256"/>
             <p14:sldId id="257"/>
@@ -204,7 +204,7 @@
     </p:spTree>
     <p:extLst>
       <p:ext uri="{BB962C8B-B14F-4D97-AF65-F5344CB8AC3E}">
-        <p14:creationId xmlns:p14="http://schemas.microsoft.com/office/powerpoint/2010/main" val="1411164322"/>
+        <p14:creationId xmlns:p14="http://schemas.microsoft.com/office/powerpoint/2010/main" val="3738085940"/>
       </p:ext>
     </p:extLst>
   </p:cSld>
@@ -351,7 +351,6 @@
             <a:r>
               <a:rPr lang="en-US" dirty="0"/>
               <a:t>20:00–20:01. Inicia la grabación en la nube (Basico1-Martes_S03_2026-10-27 o Basico1-Jueves_S03_2026-10-29) y comparte el deck. Saluda con una leve inclinación: «안녕하세요!» y espera que el grupo responda con cámara. En español: «¡Bienvenidos a la semana 3! La semana pasada aprendimos a presentarnos. Hoy empezamos a preguntar por todo lo que nos rodea. Pero primero, el quiz: 3 minutos, 5 respuestas, en un solo mensaje privado para mí.»
-Imagen sugerida: Logo azul de Academia Seúl (portada de la casa)
 Fuente: S03 C.14 L1 · B 20:00 · C.3 Bloque 0
 Lámina 1</a:t>
             </a:r>
@@ -975,7 +974,7 @@
             <a:r>
               <a:rPr lang="en-US" dirty="0"/>
               <a:t>20:17–20:18. Muestra la foto sin texto: «이거 뭐예요?» y deja que adivinen en español («¿un pescado?», «¿un waffle?»). «¡Para esto sirve 뭐예요: para lo que no conoces!» Clic: «붕어빵이에요. 따라 하세요: 붕어빵이에요.» → coro.
-Imagen sugerida: Foto de 붕어빵 sin texto (licencia libre o propia del equipo; sin rojo)
+Imagen: incluida (dibujo de la casa).
 Fuente: S03 C.14 L15 · C.3 1e · A campo 7
 Lámina 15</a:t>
             </a:r>
@@ -1154,7 +1153,7 @@
             <a:r>
               <a:rPr lang="en-US" dirty="0"/>
               <a:t>20:20–20:23. Ítems 1–5 en coro, con micrófonos abiertos: señalas la imagen y preguntas («빵이에요?»); el grupo responde la frase completa y el clic muestra la respuesta. Si prefieres, muestra a la cámara los dibujos de la lección 3 de tu libro (no se copian en el deck). La corrección siempre termina en ___이에요/예요; 김치, 우유 y 밥 son reciclaje de la S1–S2.
-Imagen sugerida: 5 imágenes numeradas, propias o íconos (ninguna en rojo): 1 pan · 2 vaso de leche · 3 libro · 4 taza de café · 5 plato de arroz
+Imagen: incluida (dibujo de la casa).
 Fuente: S03 C.14 L17 · C.13 Quiz relámpago · C.3 2a
 Lámina 17</a:t>
             </a:r>
@@ -1244,7 +1243,7 @@
             <a:r>
               <a:rPr lang="en-US" dirty="0"/>
               <a:t>20:23–20:25. Ítems 6–10 por nombre: dices el nombre del alumno, señalas la imagen y haces la pregunta; responde con la frase completa. Si responde solo «아니요», pide el resto con un gesto de «sigue» y, si hace falta, en español: «frase completa». 구두, 모자 y 오이 son reciclaje de la S1.
-Imagen sugerida: 5 imágenes numeradas, propias o íconos (ninguna en rojo): 6 silla · 7 gorro · 8 lápiz · 9 reloj de pulsera · 10 pepino
+Imagen: incluida (dibujo de la casa).
 Fuente: S03 C.14 L18 · C.13 Quiz relámpago · C.3 2a
 Lámina 18</a:t>
             </a:r>
@@ -1868,7 +1867,7 @@
             <a:r>
               <a:rPr lang="en-US" dirty="0"/>
               <a:t>Tarea A (20:34–20:40). Turno de A (3 min): elige una cosa de la escena y dice una frase con 이거, 그거 o 저거 desde su lugar («저거 시계예요.»); B es el árbitro. Turno de B (3 min): ahora lo que está cerca de B es 이거. El árbitro también puede preguntar «그게 뭐예요?» · «저게 뭐예요?». En salas de 3, la tercera persona es segunda árbitra y después toma un turno.
-Imagen sugerida: Dibujo simple de un café de Seúl: dos personajes frente a frente (A y B); cerca de A café, celular y libro; cerca de B bolso, paraguas y cuaderno; reloj en la pared del fondo y puesto de 붕어빵 en la calle, lejos de los dos. La misma escena de la tarjeta A del material del alumno. Sin rojo.
+Imagen: incluida (dibujo de la casa).
 Fuente: S03 C.14 L22 · Material del alumno §7 Tarea A
 Lámina 22</a:t>
             </a:r>
@@ -2403,7 +2402,6 @@
             <a:r>
               <a:rPr lang="en-US" dirty="0"/>
               <a:t>«감사합니다! 화이팅!» Despedida con la convención de la S2 (ellos se van y tú te quedas): te dicen «안녕히 계세요!» y respondes «안녕히 가세요!». 20:58: detienes la grabación y «Finalizar reunión para todos» (a las 21:00 empieza otra clase en la misma cuenta).
-Imagen sugerida: Sello del tigre (versión 2, sin marco)
 Fuente: S03 C.14 L27 · C.3 Bloque 4
 Lámina 27</a:t>
             </a:r>
@@ -2582,7 +2580,7 @@
             <a:r>
               <a:rPr lang="en-US" dirty="0"/>
               <a:t>Fondo de la bolsa misteriosa (20:05–20:08, R): deja de compartir y destaca tu video; los alumnos solo escuchan y repiten, sin ver nada escrito. Guion: «이게 뭐예요?» (pausa) «책이에요. 따라 하세요: 책이에요.» → coro; sigue con 연필 → 공책 → 휴대폰 → 시계 → 우산 → 안경 → 열쇠 → 컵 → 물, tocas tu 책상 y tu 의자 («책상이에요. 의자예요.») y levantas la taza («커피예요.»). Desde el cuarto objeto deja 2 segundos antes de responder; final: das vuelta la bolsa vacía: «이게 뭐예요? … 가방이에요!» Al volver al deck (L4), esta lámina se pasa de largo.
-Imagen sugerida: Silueta de una bolsa o mochila (가방), en azul o gris; solo la pregunta, enorme
+Imagen: incluida (dibujo de la casa).
 Fuente: S03 C.14 L5 · C.3 1a · C.2 (la bolsa)
 Lámina 5</a:t>
             </a:r>
@@ -2939,7 +2937,7 @@
             <a:r>
               <a:rPr lang="en-US" dirty="0"/>
               <a:t>«En español tenemos este, ese y aquel. En coreano también son tres: 이, 그, 저. Y 거 es 'cosa'. 이거 es esta cosa, cerca de mí; 그거, esa cosa, cerca de ti; 저거, aquella cosa, lejos de los dos.» Demo en vivo: con tu lápiz, «이거 연필이에요.»; pide a un alumno que levante su libro: «[nombre], 그게 뭐예요?» → «책이에요.» → «잘했어요!» y explica: «Para mí es 그거; para [nombre] es 이거.» Ojo: los apuntes de julio decían «저게 = eso»; es «aquello».
-Imagen sugerida: Esquema de 3 zonas: persona A con un lápiz (이거), persona B con un libro (그거) y un reloj lejos de los dos (저거); íconos de mano en el pecho, hacia el otro y a lo lejos
+Imagen: incluida (dibujo de la casa).
 Fuente: S03 C.14 L8 · C.3 1b · C.4 · C.6
 Lámina 8</a:t>
             </a:r>
@@ -5093,7 +5091,7 @@
         <p:spPr>
           <a:xfrm>
             <a:off x="548640" y="1325880"/>
-            <a:ext cx="11064240" cy="457200"/>
+            <a:ext cx="11091672" cy="457200"/>
           </a:xfrm>
           <a:prstGeom prst="rect">
             <a:avLst/>
@@ -5837,7 +5835,7 @@
         <p:spPr>
           <a:xfrm>
             <a:off x="548640" y="1325880"/>
-            <a:ext cx="11064240" cy="457200"/>
+            <a:ext cx="11091672" cy="457200"/>
           </a:xfrm>
           <a:prstGeom prst="rect">
             <a:avLst/>
@@ -6432,7 +6430,7 @@
         <p:spPr>
           <a:xfrm>
             <a:off x="548640" y="1325880"/>
-            <a:ext cx="11064240" cy="457200"/>
+            <a:ext cx="11091672" cy="457200"/>
           </a:xfrm>
           <a:prstGeom prst="rect">
             <a:avLst/>
@@ -6972,7 +6970,7 @@
         <p:spPr>
           <a:xfrm>
             <a:off x="548640" y="1325880"/>
-            <a:ext cx="11064240" cy="457200"/>
+            <a:ext cx="11091672" cy="457200"/>
           </a:xfrm>
           <a:prstGeom prst="rect">
             <a:avLst/>
@@ -7021,7 +7019,7 @@
           <p:nvPr>
             <p:extLst>
               <p:ext uri="{D42A27DB-BD31-4B8C-83A1-F6EECF244321}">
-                <p14:modId xmlns:p14="http://schemas.microsoft.com/office/powerpoint/2010/main" val="3084084576"/>
+                <p14:modId xmlns:p14="http://schemas.microsoft.com/office/powerpoint/2010/main" val="2566336840"/>
               </p:ext>
             </p:extLst>
           </p:nvPr>
@@ -8219,16 +8217,40 @@
           </a:p>
         </p:txBody>
       </p:sp>
-      <p:sp>
-        <p:nvSpPr>
-          <p:cNvPr id="3" name="Text 1"/>
+      <p:pic>
+        <p:nvPicPr>
+          <p:cNvPr id="3" name="imagen" descr="C:\Users\Chingu\AppData\Local\Temp\claude\C--Users-Chingu-Desktop-ACADEMIASEULWEB\d4111e1b-5523-44ea-97b2-b1a1d9545b9e\scratchpad\decks\cache\img_c156e1d17f80622c.png"/>
+          <p:cNvPicPr>
+            <a:picLocks noChangeAspect="1"/>
+          </p:cNvPicPr>
+          <p:nvPr/>
+        </p:nvPicPr>
+        <p:blipFill>
+          <a:blip r:embed="rId3"/>
+          <a:stretch>
+            <a:fillRect/>
+          </a:stretch>
+        </p:blipFill>
+        <p:spPr>
+          <a:xfrm>
+            <a:off x="7754112" y="1508760"/>
+            <a:ext cx="3886200" cy="4480560"/>
+          </a:xfrm>
+          <a:prstGeom prst="rect">
+            <a:avLst/>
+          </a:prstGeom>
+        </p:spPr>
+      </p:pic>
+      <p:sp>
+        <p:nvSpPr>
+          <p:cNvPr id="4" name="Text 1"/>
           <p:cNvSpPr txBox="1"/>
           <p:nvPr/>
         </p:nvSpPr>
         <p:spPr>
           <a:xfrm>
             <a:off x="548640" y="1325880"/>
-            <a:ext cx="11064240" cy="548640"/>
+            <a:ext cx="6931152" cy="548640"/>
           </a:xfrm>
           <a:prstGeom prst="rect">
             <a:avLst/>
@@ -8259,13 +8281,13 @@
       </p:sp>
       <p:sp>
         <p:nvSpPr>
-          <p:cNvPr id="4" name="num_0"/>
+          <p:cNvPr id="5" name="num_0"/>
           <p:cNvSpPr/>
           <p:nvPr/>
         </p:nvSpPr>
         <p:spPr>
           <a:xfrm>
-            <a:off x="548640" y="2171700"/>
+            <a:off x="548640" y="3236976"/>
             <a:ext cx="457200" cy="457200"/>
           </a:xfrm>
           <a:prstGeom prst="ellipse">
@@ -8284,13 +8306,13 @@
       </p:sp>
       <p:sp>
         <p:nvSpPr>
-          <p:cNvPr id="5" name="Text 3"/>
+          <p:cNvPr id="6" name="Text 3"/>
           <p:cNvSpPr txBox="1"/>
           <p:nvPr/>
         </p:nvSpPr>
         <p:spPr>
           <a:xfrm>
-            <a:off x="548640" y="2171700"/>
+            <a:off x="548640" y="3236976"/>
             <a:ext cx="457200" cy="457200"/>
           </a:xfrm>
           <a:prstGeom prst="rect">
@@ -8322,14 +8344,14 @@
       </p:sp>
       <p:sp>
         <p:nvSpPr>
-          <p:cNvPr id="6" name="Text 4"/>
+          <p:cNvPr id="7" name="Text 4"/>
           <p:cNvSpPr txBox="1"/>
           <p:nvPr/>
         </p:nvSpPr>
         <p:spPr>
           <a:xfrm>
-            <a:off x="1188720" y="1965960"/>
-            <a:ext cx="6080760" cy="868680"/>
+            <a:off x="1188720" y="2871216"/>
+            <a:ext cx="2735519" cy="1188720"/>
           </a:xfrm>
           <a:prstGeom prst="rect">
             <a:avLst/>
@@ -8371,18 +8393,18 @@
       </p:sp>
       <p:sp>
         <p:nvSpPr>
-          <p:cNvPr id="7" name="rev_5_caja"/>
+          <p:cNvPr id="8" name="rev_5_caja"/>
           <p:cNvSpPr/>
           <p:nvPr/>
         </p:nvSpPr>
         <p:spPr>
           <a:xfrm>
-            <a:off x="7498080" y="2002536"/>
-            <a:ext cx="4142232" cy="795528"/>
+            <a:off x="4152839" y="2907792"/>
+            <a:ext cx="3326953" cy="1115568"/>
           </a:xfrm>
           <a:prstGeom prst="roundRect">
             <a:avLst>
-              <a:gd name="adj" fmla="val 13793"/>
+              <a:gd name="adj" fmla="val 9836"/>
             </a:avLst>
           </a:prstGeom>
           <a:solidFill>
@@ -8398,14 +8420,14 @@
       </p:sp>
       <p:sp>
         <p:nvSpPr>
-          <p:cNvPr id="8" name="rev_5_txt"/>
+          <p:cNvPr id="9" name="rev_5_txt"/>
           <p:cNvSpPr txBox="1"/>
           <p:nvPr/>
         </p:nvSpPr>
         <p:spPr>
           <a:xfrm>
-            <a:off x="7589520" y="2002536"/>
-            <a:ext cx="3959352" cy="795528"/>
+            <a:off x="4244279" y="2907792"/>
+            <a:ext cx="3144073" cy="1115568"/>
           </a:xfrm>
           <a:prstGeom prst="rect">
             <a:avLst/>
@@ -8532,7 +8554,7 @@
                                           </p:stCondLst>
                                         </p:cTn>
                                         <p:tgtEl>
-                                          <p:spTgt spid="7"/>
+                                          <p:spTgt spid="8"/>
                                         </p:tgtEl>
                                         <p:attrNameLst>
                                           <p:attrName>style.visibility</p:attrName>
@@ -8559,7 +8581,7 @@
                                           </p:stCondLst>
                                         </p:cTn>
                                         <p:tgtEl>
-                                          <p:spTgt spid="8"/>
+                                          <p:spTgt spid="9"/>
                                         </p:tgtEl>
                                         <p:attrNameLst>
                                           <p:attrName>style.visibility</p:attrName>
@@ -8600,7 +8622,7 @@
       </p:par>
     </p:tnLst>
     <p:bldLst>
-      <p:bldP spid="8" grpId="0" animBg="1"/>
+      <p:bldP spid="9" grpId="0" animBg="1"/>
     </p:bldLst>
   </p:timing>
 </p:sld>
@@ -9116,7 +9138,7 @@
         <p:spPr>
           <a:xfrm>
             <a:off x="548640" y="1325880"/>
-            <a:ext cx="11064240" cy="548640"/>
+            <a:ext cx="11091672" cy="548640"/>
           </a:xfrm>
           <a:prstGeom prst="rect">
             <a:avLst/>
@@ -9291,14 +9313,72 @@
       </p:sp>
       <p:sp>
         <p:nvSpPr>
-          <p:cNvPr id="4" name="num_0"/>
+          <p:cNvPr id="4" name="card_0"/>
           <p:cNvSpPr/>
           <p:nvPr/>
         </p:nvSpPr>
         <p:spPr>
           <a:xfrm>
-            <a:off x="548640" y="2106778"/>
-            <a:ext cx="457200" cy="457200"/>
+            <a:off x="548640" y="1965960"/>
+            <a:ext cx="2072030" cy="4206240"/>
+          </a:xfrm>
+          <a:prstGeom prst="roundRect">
+            <a:avLst>
+              <a:gd name="adj" fmla="val 6620"/>
+            </a:avLst>
+          </a:prstGeom>
+          <a:solidFill>
+            <a:srgbClr val="FFFFFF"/>
+          </a:solidFill>
+          <a:ln w="12700">
+            <a:solidFill>
+              <a:srgbClr val="D9D7F7"/>
+            </a:solidFill>
+            <a:prstDash val="solid"/>
+          </a:ln>
+          <a:effectLst>
+            <a:outerShdw blurRad="76200" dist="25400" dir="5400000" algn="bl" rotWithShape="0">
+              <a:srgbClr val="14142B">
+                <a:alpha val="12000"/>
+              </a:srgbClr>
+            </a:outerShdw>
+          </a:effectLst>
+        </p:spPr>
+      </p:sp>
+      <p:pic>
+        <p:nvPicPr>
+          <p:cNvPr id="5" name="item_img_0" descr="C:\Users\Chingu\AppData\Local\Temp\claude\C--Users-Chingu-Desktop-ACADEMIASEULWEB\d4111e1b-5523-44ea-97b2-b1a1d9545b9e\scratchpad\decks\cache\img_d1706db066479094.png"/>
+          <p:cNvPicPr>
+            <a:picLocks noChangeAspect="1"/>
+          </p:cNvPicPr>
+          <p:nvPr/>
+        </p:nvPicPr>
+        <p:blipFill>
+          <a:blip r:embed="rId3"/>
+          <a:stretch>
+            <a:fillRect/>
+          </a:stretch>
+        </p:blipFill>
+        <p:spPr>
+          <a:xfrm>
+            <a:off x="670255" y="2057400"/>
+            <a:ext cx="1828800" cy="1828800"/>
+          </a:xfrm>
+          <a:prstGeom prst="rect">
+            <a:avLst/>
+          </a:prstGeom>
+        </p:spPr>
+      </p:pic>
+      <p:sp>
+        <p:nvSpPr>
+          <p:cNvPr id="6" name="num_0"/>
+          <p:cNvSpPr/>
+          <p:nvPr/>
+        </p:nvSpPr>
+        <p:spPr>
+          <a:xfrm>
+            <a:off x="640080" y="2057400"/>
+            <a:ext cx="420624" cy="420624"/>
           </a:xfrm>
           <a:prstGeom prst="ellipse">
             <a:avLst/>
@@ -9306,9 +9386,9 @@
           <a:solidFill>
             <a:srgbClr val="003478"/>
           </a:solidFill>
-          <a:ln w="12700">
+          <a:ln w="19050">
             <a:solidFill>
-              <a:srgbClr val="003478"/>
+              <a:srgbClr val="FFFFFF"/>
             </a:solidFill>
             <a:prstDash val="solid"/>
           </a:ln>
@@ -9316,14 +9396,14 @@
       </p:sp>
       <p:sp>
         <p:nvSpPr>
-          <p:cNvPr id="5" name="Text 3"/>
+          <p:cNvPr id="7" name="Text 4"/>
           <p:cNvSpPr txBox="1"/>
           <p:nvPr/>
         </p:nvSpPr>
         <p:spPr>
           <a:xfrm>
-            <a:off x="548640" y="2106778"/>
-            <a:ext cx="457200" cy="457200"/>
+            <a:off x="640080" y="2057400"/>
+            <a:ext cx="420624" cy="420624"/>
           </a:xfrm>
           <a:prstGeom prst="rect">
             <a:avLst/>
@@ -9341,27 +9421,27 @@
               <a:buNone/>
             </a:pPr>
             <a:r>
-              <a:rPr lang="en-US" sz="1600" b="1" dirty="0">
+              <a:rPr lang="en-US" sz="1500" b="1" dirty="0">
                 <a:solidFill>
                   <a:srgbClr val="FFFFFF"/>
                 </a:solidFill>
               </a:rPr>
               <a:t>1</a:t>
             </a:r>
-            <a:endParaRPr lang="en-US" sz="1600" dirty="0"/>
-          </a:p>
-        </p:txBody>
-      </p:sp>
-      <p:sp>
-        <p:nvSpPr>
-          <p:cNvPr id="6" name="Text 4"/>
+            <a:endParaRPr lang="en-US" sz="1500" dirty="0"/>
+          </a:p>
+        </p:txBody>
+      </p:sp>
+      <p:sp>
+        <p:nvSpPr>
+          <p:cNvPr id="8" name="Text 5"/>
           <p:cNvSpPr txBox="1"/>
           <p:nvPr/>
         </p:nvSpPr>
         <p:spPr>
           <a:xfrm>
-            <a:off x="1188720" y="1965960"/>
-            <a:ext cx="5285232" cy="738835"/>
+            <a:off x="640080" y="3931920"/>
+            <a:ext cx="1889150" cy="1234440"/>
           </a:xfrm>
           <a:prstGeom prst="rect">
             <a:avLst/>
@@ -9375,11 +9455,11 @@
           </a:bodyPr>
           <a:lstStyle/>
           <a:p>
-            <a:pPr marL="0" indent="0" eaLnBrk="1">
+            <a:pPr marL="0" indent="0" algn="ctr" eaLnBrk="1">
               <a:buNone/>
             </a:pPr>
             <a:r>
-              <a:rPr lang="ko-KR" altLang="en-US" sz="2400" dirty="0">
+              <a:rPr lang="ko-KR" altLang="en-US" sz="2200" dirty="0">
                 <a:solidFill>
                   <a:srgbClr val="14142B"/>
                 </a:solidFill>
@@ -9390,31 +9470,31 @@
               <a:t>(pan) 빵이에요</a:t>
             </a:r>
             <a:r>
-              <a:rPr lang="en-US" sz="2400" dirty="0">
+              <a:rPr lang="en-US" sz="2200" dirty="0">
                 <a:solidFill>
                   <a:srgbClr val="14142B"/>
                 </a:solidFill>
               </a:rPr>
               <a:t>?</a:t>
             </a:r>
-            <a:endParaRPr lang="en-US" sz="2400" dirty="0"/>
-          </a:p>
-        </p:txBody>
-      </p:sp>
-      <p:sp>
-        <p:nvSpPr>
-          <p:cNvPr id="7" name="rev_6_caja"/>
+            <a:endParaRPr lang="en-US" sz="2200" dirty="0"/>
+          </a:p>
+        </p:txBody>
+      </p:sp>
+      <p:sp>
+        <p:nvSpPr>
+          <p:cNvPr id="9" name="rev_6_caja"/>
           <p:cNvSpPr/>
           <p:nvPr/>
         </p:nvSpPr>
         <p:spPr>
           <a:xfrm>
-            <a:off x="6702552" y="2002536"/>
-            <a:ext cx="4937760" cy="665683"/>
+            <a:off x="658368" y="5212080"/>
+            <a:ext cx="1852574" cy="868680"/>
           </a:xfrm>
           <a:prstGeom prst="roundRect">
             <a:avLst>
-              <a:gd name="adj" fmla="val 16484"/>
+              <a:gd name="adj" fmla="val 12632"/>
             </a:avLst>
           </a:prstGeom>
           <a:solidFill>
@@ -9430,14 +9510,14 @@
       </p:sp>
       <p:sp>
         <p:nvSpPr>
-          <p:cNvPr id="8" name="rev_6_txt"/>
+          <p:cNvPr id="10" name="rev_6_txt"/>
           <p:cNvSpPr txBox="1"/>
           <p:nvPr/>
         </p:nvSpPr>
         <p:spPr>
           <a:xfrm>
-            <a:off x="6793992" y="2002536"/>
-            <a:ext cx="4754880" cy="665683"/>
+            <a:off x="685800" y="5212080"/>
+            <a:ext cx="1797710" cy="868680"/>
           </a:xfrm>
           <a:prstGeom prst="rect">
             <a:avLst/>
@@ -9455,7 +9535,7 @@
               <a:buNone/>
             </a:pPr>
             <a:r>
-              <a:rPr lang="ko-KR" altLang="en-US" sz="2200" b="1" dirty="0">
+              <a:rPr lang="ko-KR" altLang="en-US" sz="1700" b="1" dirty="0">
                 <a:solidFill>
                   <a:srgbClr val="FFFFFF"/>
                 </a:solidFill>
@@ -9466,7 +9546,7 @@
               <a:t>네</a:t>
             </a:r>
             <a:r>
-              <a:rPr lang="en-US" sz="2200" b="1" dirty="0">
+              <a:rPr lang="en-US" sz="1700" b="1" dirty="0">
                 <a:solidFill>
                   <a:srgbClr val="FFFFFF"/>
                 </a:solidFill>
@@ -9474,7 +9554,7 @@
               <a:t>, </a:t>
             </a:r>
             <a:r>
-              <a:rPr lang="ko-KR" altLang="en-US" sz="2200" b="1" dirty="0">
+              <a:rPr lang="ko-KR" altLang="en-US" sz="1700" b="1" dirty="0">
                 <a:solidFill>
                   <a:srgbClr val="FFFFFF"/>
                 </a:solidFill>
@@ -9485,27 +9565,85 @@
               <a:t>빵이에요</a:t>
             </a:r>
             <a:r>
-              <a:rPr lang="en-US" sz="2200" b="1" dirty="0">
+              <a:rPr lang="en-US" sz="1700" b="1" dirty="0">
                 <a:solidFill>
                   <a:srgbClr val="FFFFFF"/>
                 </a:solidFill>
               </a:rPr>
               <a:t>.</a:t>
             </a:r>
-            <a:endParaRPr lang="en-US" sz="2200" dirty="0"/>
-          </a:p>
-        </p:txBody>
-      </p:sp>
-      <p:sp>
-        <p:nvSpPr>
-          <p:cNvPr id="9" name="num_1"/>
+            <a:endParaRPr lang="en-US" sz="1700" dirty="0"/>
+          </a:p>
+        </p:txBody>
+      </p:sp>
+      <p:sp>
+        <p:nvSpPr>
+          <p:cNvPr id="11" name="card_1"/>
           <p:cNvSpPr/>
           <p:nvPr/>
         </p:nvSpPr>
         <p:spPr>
           <a:xfrm>
-            <a:off x="548640" y="2973629"/>
-            <a:ext cx="457200" cy="457200"/>
+            <a:off x="2803550" y="1965960"/>
+            <a:ext cx="2072030" cy="4206240"/>
+          </a:xfrm>
+          <a:prstGeom prst="roundRect">
+            <a:avLst>
+              <a:gd name="adj" fmla="val 6620"/>
+            </a:avLst>
+          </a:prstGeom>
+          <a:solidFill>
+            <a:srgbClr val="FFFFFF"/>
+          </a:solidFill>
+          <a:ln w="12700">
+            <a:solidFill>
+              <a:srgbClr val="D9D7F7"/>
+            </a:solidFill>
+            <a:prstDash val="solid"/>
+          </a:ln>
+          <a:effectLst>
+            <a:outerShdw blurRad="76200" dist="25400" dir="5400000" algn="bl" rotWithShape="0">
+              <a:srgbClr val="14142B">
+                <a:alpha val="12000"/>
+              </a:srgbClr>
+            </a:outerShdw>
+          </a:effectLst>
+        </p:spPr>
+      </p:sp>
+      <p:pic>
+        <p:nvPicPr>
+          <p:cNvPr id="12" name="item_img_1" descr="C:\Users\Chingu\AppData\Local\Temp\claude\C--Users-Chingu-Desktop-ACADEMIASEULWEB\d4111e1b-5523-44ea-97b2-b1a1d9545b9e\scratchpad\decks\cache\img_8334109b724d9d7c.png"/>
+          <p:cNvPicPr>
+            <a:picLocks noChangeAspect="1"/>
+          </p:cNvPicPr>
+          <p:nvPr/>
+        </p:nvPicPr>
+        <p:blipFill>
+          <a:blip r:embed="rId4"/>
+          <a:stretch>
+            <a:fillRect/>
+          </a:stretch>
+        </p:blipFill>
+        <p:spPr>
+          <a:xfrm>
+            <a:off x="2925166" y="2057400"/>
+            <a:ext cx="1828800" cy="1828800"/>
+          </a:xfrm>
+          <a:prstGeom prst="rect">
+            <a:avLst/>
+          </a:prstGeom>
+        </p:spPr>
+      </p:pic>
+      <p:sp>
+        <p:nvSpPr>
+          <p:cNvPr id="13" name="num_1"/>
+          <p:cNvSpPr/>
+          <p:nvPr/>
+        </p:nvSpPr>
+        <p:spPr>
+          <a:xfrm>
+            <a:off x="2894990" y="2057400"/>
+            <a:ext cx="420624" cy="420624"/>
           </a:xfrm>
           <a:prstGeom prst="ellipse">
             <a:avLst/>
@@ -9513,9 +9651,9 @@
           <a:solidFill>
             <a:srgbClr val="003478"/>
           </a:solidFill>
-          <a:ln w="12700">
+          <a:ln w="19050">
             <a:solidFill>
-              <a:srgbClr val="003478"/>
+              <a:srgbClr val="FFFFFF"/>
             </a:solidFill>
             <a:prstDash val="solid"/>
           </a:ln>
@@ -9523,14 +9661,14 @@
       </p:sp>
       <p:sp>
         <p:nvSpPr>
-          <p:cNvPr id="10" name="Text 8"/>
+          <p:cNvPr id="14" name="Text 10"/>
           <p:cNvSpPr txBox="1"/>
           <p:nvPr/>
         </p:nvSpPr>
         <p:spPr>
           <a:xfrm>
-            <a:off x="548640" y="2973629"/>
-            <a:ext cx="457200" cy="457200"/>
+            <a:off x="2894990" y="2057400"/>
+            <a:ext cx="420624" cy="420624"/>
           </a:xfrm>
           <a:prstGeom prst="rect">
             <a:avLst/>
@@ -9548,27 +9686,27 @@
               <a:buNone/>
             </a:pPr>
             <a:r>
-              <a:rPr lang="en-US" sz="1600" b="1" dirty="0">
+              <a:rPr lang="en-US" sz="1500" b="1" dirty="0">
                 <a:solidFill>
                   <a:srgbClr val="FFFFFF"/>
                 </a:solidFill>
               </a:rPr>
               <a:t>2</a:t>
             </a:r>
-            <a:endParaRPr lang="en-US" sz="1600" dirty="0"/>
-          </a:p>
-        </p:txBody>
-      </p:sp>
-      <p:sp>
-        <p:nvSpPr>
-          <p:cNvPr id="11" name="Text 9"/>
+            <a:endParaRPr lang="en-US" sz="1500" dirty="0"/>
+          </a:p>
+        </p:txBody>
+      </p:sp>
+      <p:sp>
+        <p:nvSpPr>
+          <p:cNvPr id="15" name="Text 11"/>
           <p:cNvSpPr txBox="1"/>
           <p:nvPr/>
         </p:nvSpPr>
         <p:spPr>
           <a:xfrm>
-            <a:off x="1188720" y="2832811"/>
-            <a:ext cx="5285232" cy="738835"/>
+            <a:off x="2894990" y="3931920"/>
+            <a:ext cx="1889150" cy="1234440"/>
           </a:xfrm>
           <a:prstGeom prst="rect">
             <a:avLst/>
@@ -9582,11 +9720,11 @@
           </a:bodyPr>
           <a:lstStyle/>
           <a:p>
-            <a:pPr marL="0" indent="0" eaLnBrk="1">
+            <a:pPr marL="0" indent="0" algn="ctr" eaLnBrk="1">
               <a:buNone/>
             </a:pPr>
             <a:r>
-              <a:rPr lang="ko-KR" altLang="en-US" sz="2400" dirty="0">
+              <a:rPr lang="ko-KR" altLang="en-US" sz="2200" dirty="0">
                 <a:solidFill>
                   <a:srgbClr val="14142B"/>
                 </a:solidFill>
@@ -9597,31 +9735,31 @@
               <a:t>(vaso de leche) 물이에요</a:t>
             </a:r>
             <a:r>
-              <a:rPr lang="en-US" sz="2400" dirty="0">
+              <a:rPr lang="en-US" sz="2200" dirty="0">
                 <a:solidFill>
                   <a:srgbClr val="14142B"/>
                 </a:solidFill>
               </a:rPr>
               <a:t>?</a:t>
             </a:r>
-            <a:endParaRPr lang="en-US" sz="2400" dirty="0"/>
-          </a:p>
-        </p:txBody>
-      </p:sp>
-      <p:sp>
-        <p:nvSpPr>
-          <p:cNvPr id="12" name="rev_7_caja"/>
+            <a:endParaRPr lang="en-US" sz="2200" dirty="0"/>
+          </a:p>
+        </p:txBody>
+      </p:sp>
+      <p:sp>
+        <p:nvSpPr>
+          <p:cNvPr id="16" name="rev_7_caja"/>
           <p:cNvSpPr/>
           <p:nvPr/>
         </p:nvSpPr>
         <p:spPr>
           <a:xfrm>
-            <a:off x="6702552" y="2869387"/>
-            <a:ext cx="4937760" cy="665683"/>
+            <a:off x="2913278" y="5212080"/>
+            <a:ext cx="1852574" cy="868680"/>
           </a:xfrm>
           <a:prstGeom prst="roundRect">
             <a:avLst>
-              <a:gd name="adj" fmla="val 16484"/>
+              <a:gd name="adj" fmla="val 12632"/>
             </a:avLst>
           </a:prstGeom>
           <a:solidFill>
@@ -9637,14 +9775,14 @@
       </p:sp>
       <p:sp>
         <p:nvSpPr>
-          <p:cNvPr id="13" name="rev_7_txt"/>
+          <p:cNvPr id="17" name="rev_7_txt"/>
           <p:cNvSpPr txBox="1"/>
           <p:nvPr/>
         </p:nvSpPr>
         <p:spPr>
           <a:xfrm>
-            <a:off x="6793992" y="2869387"/>
-            <a:ext cx="4754880" cy="665683"/>
+            <a:off x="2940710" y="5212080"/>
+            <a:ext cx="1797710" cy="868680"/>
           </a:xfrm>
           <a:prstGeom prst="rect">
             <a:avLst/>
@@ -9662,7 +9800,7 @@
               <a:buNone/>
             </a:pPr>
             <a:r>
-              <a:rPr lang="ko-KR" altLang="en-US" sz="2100" b="1" dirty="0">
+              <a:rPr lang="ko-KR" altLang="en-US" sz="1700" b="1" dirty="0">
                 <a:solidFill>
                   <a:srgbClr val="FFFFFF"/>
                 </a:solidFill>
@@ -9673,7 +9811,7 @@
               <a:t>아니요</a:t>
             </a:r>
             <a:r>
-              <a:rPr lang="en-US" sz="2100" b="1" dirty="0">
+              <a:rPr lang="en-US" sz="1700" b="1" dirty="0">
                 <a:solidFill>
                   <a:srgbClr val="FFFFFF"/>
                 </a:solidFill>
@@ -9681,7 +9819,7 @@
               <a:t>, </a:t>
             </a:r>
             <a:r>
-              <a:rPr lang="ko-KR" altLang="en-US" sz="2100" b="1" dirty="0">
+              <a:rPr lang="ko-KR" altLang="en-US" sz="1700" b="1" dirty="0">
                 <a:solidFill>
                   <a:srgbClr val="FFFFFF"/>
                 </a:solidFill>
@@ -9692,7 +9830,7 @@
               <a:t>물이 아니에요</a:t>
             </a:r>
             <a:r>
-              <a:rPr lang="en-US" sz="2100" b="1" dirty="0">
+              <a:rPr lang="en-US" sz="1700" b="1" dirty="0">
                 <a:solidFill>
                   <a:srgbClr val="FFFFFF"/>
                 </a:solidFill>
@@ -9700,7 +9838,7 @@
               <a:t>. </a:t>
             </a:r>
             <a:r>
-              <a:rPr lang="ko-KR" altLang="en-US" sz="2100" b="1" dirty="0">
+              <a:rPr lang="ko-KR" altLang="en-US" sz="1700" b="1" dirty="0">
                 <a:solidFill>
                   <a:srgbClr val="FFFFFF"/>
                 </a:solidFill>
@@ -9711,27 +9849,85 @@
               <a:t>우유예요</a:t>
             </a:r>
             <a:r>
-              <a:rPr lang="en-US" sz="2100" b="1" dirty="0">
+              <a:rPr lang="en-US" sz="1700" b="1" dirty="0">
                 <a:solidFill>
                   <a:srgbClr val="FFFFFF"/>
                 </a:solidFill>
               </a:rPr>
               <a:t>.</a:t>
             </a:r>
-            <a:endParaRPr lang="en-US" sz="2100" dirty="0"/>
-          </a:p>
-        </p:txBody>
-      </p:sp>
-      <p:sp>
-        <p:nvSpPr>
-          <p:cNvPr id="14" name="num_2"/>
+            <a:endParaRPr lang="en-US" sz="1700" dirty="0"/>
+          </a:p>
+        </p:txBody>
+      </p:sp>
+      <p:sp>
+        <p:nvSpPr>
+          <p:cNvPr id="18" name="card_2"/>
           <p:cNvSpPr/>
           <p:nvPr/>
         </p:nvSpPr>
         <p:spPr>
           <a:xfrm>
-            <a:off x="548640" y="3840480"/>
-            <a:ext cx="457200" cy="457200"/>
+            <a:off x="5058461" y="1965960"/>
+            <a:ext cx="2072030" cy="4206240"/>
+          </a:xfrm>
+          <a:prstGeom prst="roundRect">
+            <a:avLst>
+              <a:gd name="adj" fmla="val 6620"/>
+            </a:avLst>
+          </a:prstGeom>
+          <a:solidFill>
+            <a:srgbClr val="FFFFFF"/>
+          </a:solidFill>
+          <a:ln w="12700">
+            <a:solidFill>
+              <a:srgbClr val="D9D7F7"/>
+            </a:solidFill>
+            <a:prstDash val="solid"/>
+          </a:ln>
+          <a:effectLst>
+            <a:outerShdw blurRad="76200" dist="25400" dir="5400000" algn="bl" rotWithShape="0">
+              <a:srgbClr val="14142B">
+                <a:alpha val="12000"/>
+              </a:srgbClr>
+            </a:outerShdw>
+          </a:effectLst>
+        </p:spPr>
+      </p:sp>
+      <p:pic>
+        <p:nvPicPr>
+          <p:cNvPr id="19" name="item_img_2" descr="C:\Users\Chingu\AppData\Local\Temp\claude\C--Users-Chingu-Desktop-ACADEMIASEULWEB\d4111e1b-5523-44ea-97b2-b1a1d9545b9e\scratchpad\decks\cache\img_1b36426dcaf1178d.png"/>
+          <p:cNvPicPr>
+            <a:picLocks noChangeAspect="1"/>
+          </p:cNvPicPr>
+          <p:nvPr/>
+        </p:nvPicPr>
+        <p:blipFill>
+          <a:blip r:embed="rId5"/>
+          <a:stretch>
+            <a:fillRect/>
+          </a:stretch>
+        </p:blipFill>
+        <p:spPr>
+          <a:xfrm>
+            <a:off x="5180076" y="2057400"/>
+            <a:ext cx="1828800" cy="1828800"/>
+          </a:xfrm>
+          <a:prstGeom prst="rect">
+            <a:avLst/>
+          </a:prstGeom>
+        </p:spPr>
+      </p:pic>
+      <p:sp>
+        <p:nvSpPr>
+          <p:cNvPr id="20" name="num_2"/>
+          <p:cNvSpPr/>
+          <p:nvPr/>
+        </p:nvSpPr>
+        <p:spPr>
+          <a:xfrm>
+            <a:off x="5149901" y="2057400"/>
+            <a:ext cx="420624" cy="420624"/>
           </a:xfrm>
           <a:prstGeom prst="ellipse">
             <a:avLst/>
@@ -9739,9 +9935,9 @@
           <a:solidFill>
             <a:srgbClr val="003478"/>
           </a:solidFill>
-          <a:ln w="12700">
+          <a:ln w="19050">
             <a:solidFill>
-              <a:srgbClr val="003478"/>
+              <a:srgbClr val="FFFFFF"/>
             </a:solidFill>
             <a:prstDash val="solid"/>
           </a:ln>
@@ -9749,14 +9945,14 @@
       </p:sp>
       <p:sp>
         <p:nvSpPr>
-          <p:cNvPr id="15" name="Text 13"/>
+          <p:cNvPr id="21" name="Text 16"/>
           <p:cNvSpPr txBox="1"/>
           <p:nvPr/>
         </p:nvSpPr>
         <p:spPr>
           <a:xfrm>
-            <a:off x="548640" y="3840480"/>
-            <a:ext cx="457200" cy="457200"/>
+            <a:off x="5149901" y="2057400"/>
+            <a:ext cx="420624" cy="420624"/>
           </a:xfrm>
           <a:prstGeom prst="rect">
             <a:avLst/>
@@ -9774,27 +9970,27 @@
               <a:buNone/>
             </a:pPr>
             <a:r>
-              <a:rPr lang="en-US" sz="1600" b="1" dirty="0">
+              <a:rPr lang="en-US" sz="1500" b="1" dirty="0">
                 <a:solidFill>
                   <a:srgbClr val="FFFFFF"/>
                 </a:solidFill>
               </a:rPr>
               <a:t>3</a:t>
             </a:r>
-            <a:endParaRPr lang="en-US" sz="1600" dirty="0"/>
-          </a:p>
-        </p:txBody>
-      </p:sp>
-      <p:sp>
-        <p:nvSpPr>
-          <p:cNvPr id="16" name="Text 14"/>
+            <a:endParaRPr lang="en-US" sz="1500" dirty="0"/>
+          </a:p>
+        </p:txBody>
+      </p:sp>
+      <p:sp>
+        <p:nvSpPr>
+          <p:cNvPr id="22" name="Text 17"/>
           <p:cNvSpPr txBox="1"/>
           <p:nvPr/>
         </p:nvSpPr>
         <p:spPr>
           <a:xfrm>
-            <a:off x="1188720" y="3699662"/>
-            <a:ext cx="5285232" cy="738835"/>
+            <a:off x="5149901" y="3931920"/>
+            <a:ext cx="1889150" cy="1234440"/>
           </a:xfrm>
           <a:prstGeom prst="rect">
             <a:avLst/>
@@ -9808,11 +10004,11 @@
           </a:bodyPr>
           <a:lstStyle/>
           <a:p>
-            <a:pPr marL="0" indent="0" eaLnBrk="1">
+            <a:pPr marL="0" indent="0" algn="ctr" eaLnBrk="1">
               <a:buNone/>
             </a:pPr>
             <a:r>
-              <a:rPr lang="ko-KR" altLang="en-US" sz="2400" dirty="0">
+              <a:rPr lang="ko-KR" altLang="en-US" sz="2200" dirty="0">
                 <a:solidFill>
                   <a:srgbClr val="14142B"/>
                 </a:solidFill>
@@ -9823,31 +10019,31 @@
               <a:t>(libro) 책이에요</a:t>
             </a:r>
             <a:r>
-              <a:rPr lang="en-US" sz="2400" dirty="0">
+              <a:rPr lang="en-US" sz="2200" dirty="0">
                 <a:solidFill>
                   <a:srgbClr val="14142B"/>
                 </a:solidFill>
               </a:rPr>
               <a:t>?</a:t>
             </a:r>
-            <a:endParaRPr lang="en-US" sz="2400" dirty="0"/>
-          </a:p>
-        </p:txBody>
-      </p:sp>
-      <p:sp>
-        <p:nvSpPr>
-          <p:cNvPr id="17" name="rev_8_caja"/>
+            <a:endParaRPr lang="en-US" sz="2200" dirty="0"/>
+          </a:p>
+        </p:txBody>
+      </p:sp>
+      <p:sp>
+        <p:nvSpPr>
+          <p:cNvPr id="23" name="rev_8_caja"/>
           <p:cNvSpPr/>
           <p:nvPr/>
         </p:nvSpPr>
         <p:spPr>
           <a:xfrm>
-            <a:off x="6702552" y="3736238"/>
-            <a:ext cx="4937760" cy="665683"/>
+            <a:off x="5168189" y="5212080"/>
+            <a:ext cx="1852574" cy="868680"/>
           </a:xfrm>
           <a:prstGeom prst="roundRect">
             <a:avLst>
-              <a:gd name="adj" fmla="val 16484"/>
+              <a:gd name="adj" fmla="val 12632"/>
             </a:avLst>
           </a:prstGeom>
           <a:solidFill>
@@ -9863,14 +10059,14 @@
       </p:sp>
       <p:sp>
         <p:nvSpPr>
-          <p:cNvPr id="18" name="rev_8_txt"/>
+          <p:cNvPr id="24" name="rev_8_txt"/>
           <p:cNvSpPr txBox="1"/>
           <p:nvPr/>
         </p:nvSpPr>
         <p:spPr>
           <a:xfrm>
-            <a:off x="6793992" y="3736238"/>
-            <a:ext cx="4754880" cy="665683"/>
+            <a:off x="5195621" y="5212080"/>
+            <a:ext cx="1797710" cy="868680"/>
           </a:xfrm>
           <a:prstGeom prst="rect">
             <a:avLst/>
@@ -9888,7 +10084,7 @@
               <a:buNone/>
             </a:pPr>
             <a:r>
-              <a:rPr lang="ko-KR" altLang="en-US" sz="2200" b="1" dirty="0">
+              <a:rPr lang="ko-KR" altLang="en-US" sz="1700" b="1" dirty="0">
                 <a:solidFill>
                   <a:srgbClr val="FFFFFF"/>
                 </a:solidFill>
@@ -9899,7 +10095,7 @@
               <a:t>네</a:t>
             </a:r>
             <a:r>
-              <a:rPr lang="en-US" sz="2200" b="1" dirty="0">
+              <a:rPr lang="en-US" sz="1700" b="1" dirty="0">
                 <a:solidFill>
                   <a:srgbClr val="FFFFFF"/>
                 </a:solidFill>
@@ -9907,7 +10103,7 @@
               <a:t>, </a:t>
             </a:r>
             <a:r>
-              <a:rPr lang="ko-KR" altLang="en-US" sz="2200" b="1" dirty="0">
+              <a:rPr lang="ko-KR" altLang="en-US" sz="1700" b="1" dirty="0">
                 <a:solidFill>
                   <a:srgbClr val="FFFFFF"/>
                 </a:solidFill>
@@ -9918,27 +10114,85 @@
               <a:t>책이에요</a:t>
             </a:r>
             <a:r>
-              <a:rPr lang="en-US" sz="2200" b="1" dirty="0">
+              <a:rPr lang="en-US" sz="1700" b="1" dirty="0">
                 <a:solidFill>
                   <a:srgbClr val="FFFFFF"/>
                 </a:solidFill>
               </a:rPr>
               <a:t>.</a:t>
             </a:r>
-            <a:endParaRPr lang="en-US" sz="2200" dirty="0"/>
-          </a:p>
-        </p:txBody>
-      </p:sp>
-      <p:sp>
-        <p:nvSpPr>
-          <p:cNvPr id="19" name="num_3"/>
+            <a:endParaRPr lang="en-US" sz="1700" dirty="0"/>
+          </a:p>
+        </p:txBody>
+      </p:sp>
+      <p:sp>
+        <p:nvSpPr>
+          <p:cNvPr id="25" name="card_3"/>
           <p:cNvSpPr/>
           <p:nvPr/>
         </p:nvSpPr>
         <p:spPr>
           <a:xfrm>
-            <a:off x="548640" y="4707331"/>
-            <a:ext cx="457200" cy="457200"/>
+            <a:off x="7313371" y="1965960"/>
+            <a:ext cx="2072030" cy="4206240"/>
+          </a:xfrm>
+          <a:prstGeom prst="roundRect">
+            <a:avLst>
+              <a:gd name="adj" fmla="val 6620"/>
+            </a:avLst>
+          </a:prstGeom>
+          <a:solidFill>
+            <a:srgbClr val="FFFFFF"/>
+          </a:solidFill>
+          <a:ln w="12700">
+            <a:solidFill>
+              <a:srgbClr val="D9D7F7"/>
+            </a:solidFill>
+            <a:prstDash val="solid"/>
+          </a:ln>
+          <a:effectLst>
+            <a:outerShdw blurRad="76200" dist="25400" dir="5400000" algn="bl" rotWithShape="0">
+              <a:srgbClr val="14142B">
+                <a:alpha val="12000"/>
+              </a:srgbClr>
+            </a:outerShdw>
+          </a:effectLst>
+        </p:spPr>
+      </p:sp>
+      <p:pic>
+        <p:nvPicPr>
+          <p:cNvPr id="26" name="item_img_3" descr="C:\Users\Chingu\AppData\Local\Temp\claude\C--Users-Chingu-Desktop-ACADEMIASEULWEB\d4111e1b-5523-44ea-97b2-b1a1d9545b9e\scratchpad\decks\cache\img_53cb8e9c870e4f7e.png"/>
+          <p:cNvPicPr>
+            <a:picLocks noChangeAspect="1"/>
+          </p:cNvPicPr>
+          <p:nvPr/>
+        </p:nvPicPr>
+        <p:blipFill>
+          <a:blip r:embed="rId6"/>
+          <a:stretch>
+            <a:fillRect/>
+          </a:stretch>
+        </p:blipFill>
+        <p:spPr>
+          <a:xfrm>
+            <a:off x="7434986" y="2057400"/>
+            <a:ext cx="1828800" cy="1828800"/>
+          </a:xfrm>
+          <a:prstGeom prst="rect">
+            <a:avLst/>
+          </a:prstGeom>
+        </p:spPr>
+      </p:pic>
+      <p:sp>
+        <p:nvSpPr>
+          <p:cNvPr id="27" name="num_3"/>
+          <p:cNvSpPr/>
+          <p:nvPr/>
+        </p:nvSpPr>
+        <p:spPr>
+          <a:xfrm>
+            <a:off x="7404811" y="2057400"/>
+            <a:ext cx="420624" cy="420624"/>
           </a:xfrm>
           <a:prstGeom prst="ellipse">
             <a:avLst/>
@@ -9946,9 +10200,9 @@
           <a:solidFill>
             <a:srgbClr val="003478"/>
           </a:solidFill>
-          <a:ln w="12700">
+          <a:ln w="19050">
             <a:solidFill>
-              <a:srgbClr val="003478"/>
+              <a:srgbClr val="FFFFFF"/>
             </a:solidFill>
             <a:prstDash val="solid"/>
           </a:ln>
@@ -9956,14 +10210,14 @@
       </p:sp>
       <p:sp>
         <p:nvSpPr>
-          <p:cNvPr id="20" name="Text 18"/>
+          <p:cNvPr id="28" name="Text 22"/>
           <p:cNvSpPr txBox="1"/>
           <p:nvPr/>
         </p:nvSpPr>
         <p:spPr>
           <a:xfrm>
-            <a:off x="548640" y="4707331"/>
-            <a:ext cx="457200" cy="457200"/>
+            <a:off x="7404811" y="2057400"/>
+            <a:ext cx="420624" cy="420624"/>
           </a:xfrm>
           <a:prstGeom prst="rect">
             <a:avLst/>
@@ -9981,27 +10235,27 @@
               <a:buNone/>
             </a:pPr>
             <a:r>
-              <a:rPr lang="en-US" sz="1600" b="1" dirty="0">
+              <a:rPr lang="en-US" sz="1500" b="1" dirty="0">
                 <a:solidFill>
                   <a:srgbClr val="FFFFFF"/>
                 </a:solidFill>
               </a:rPr>
               <a:t>4</a:t>
             </a:r>
-            <a:endParaRPr lang="en-US" sz="1600" dirty="0"/>
-          </a:p>
-        </p:txBody>
-      </p:sp>
-      <p:sp>
-        <p:nvSpPr>
-          <p:cNvPr id="21" name="Text 19"/>
+            <a:endParaRPr lang="en-US" sz="1500" dirty="0"/>
+          </a:p>
+        </p:txBody>
+      </p:sp>
+      <p:sp>
+        <p:nvSpPr>
+          <p:cNvPr id="29" name="Text 23"/>
           <p:cNvSpPr txBox="1"/>
           <p:nvPr/>
         </p:nvSpPr>
         <p:spPr>
           <a:xfrm>
-            <a:off x="1188720" y="4566514"/>
-            <a:ext cx="5285232" cy="738835"/>
+            <a:off x="7404811" y="3931920"/>
+            <a:ext cx="1889150" cy="1234440"/>
           </a:xfrm>
           <a:prstGeom prst="rect">
             <a:avLst/>
@@ -10015,11 +10269,11 @@
           </a:bodyPr>
           <a:lstStyle/>
           <a:p>
-            <a:pPr marL="0" indent="0" eaLnBrk="1">
+            <a:pPr marL="0" indent="0" algn="ctr" eaLnBrk="1">
               <a:buNone/>
             </a:pPr>
             <a:r>
-              <a:rPr lang="ko-KR" altLang="en-US" sz="2400" dirty="0">
+              <a:rPr lang="ko-KR" altLang="en-US" sz="2200" dirty="0">
                 <a:solidFill>
                   <a:srgbClr val="14142B"/>
                 </a:solidFill>
@@ -10030,31 +10284,31 @@
               <a:t>(taza de café) 우유예요</a:t>
             </a:r>
             <a:r>
-              <a:rPr lang="en-US" sz="2400" dirty="0">
+              <a:rPr lang="en-US" sz="2200" dirty="0">
                 <a:solidFill>
                   <a:srgbClr val="14142B"/>
                 </a:solidFill>
               </a:rPr>
               <a:t>?</a:t>
             </a:r>
-            <a:endParaRPr lang="en-US" sz="2400" dirty="0"/>
-          </a:p>
-        </p:txBody>
-      </p:sp>
-      <p:sp>
-        <p:nvSpPr>
-          <p:cNvPr id="22" name="rev_9_caja"/>
+            <a:endParaRPr lang="en-US" sz="2200" dirty="0"/>
+          </a:p>
+        </p:txBody>
+      </p:sp>
+      <p:sp>
+        <p:nvSpPr>
+          <p:cNvPr id="30" name="rev_9_caja"/>
           <p:cNvSpPr/>
           <p:nvPr/>
         </p:nvSpPr>
         <p:spPr>
           <a:xfrm>
-            <a:off x="6702552" y="4603090"/>
-            <a:ext cx="4937760" cy="665683"/>
+            <a:off x="7423099" y="5212080"/>
+            <a:ext cx="1852574" cy="868680"/>
           </a:xfrm>
           <a:prstGeom prst="roundRect">
             <a:avLst>
-              <a:gd name="adj" fmla="val 16484"/>
+              <a:gd name="adj" fmla="val 12632"/>
             </a:avLst>
           </a:prstGeom>
           <a:solidFill>
@@ -10070,14 +10324,14 @@
       </p:sp>
       <p:sp>
         <p:nvSpPr>
-          <p:cNvPr id="23" name="rev_9_txt"/>
+          <p:cNvPr id="31" name="rev_9_txt"/>
           <p:cNvSpPr txBox="1"/>
           <p:nvPr/>
         </p:nvSpPr>
         <p:spPr>
           <a:xfrm>
-            <a:off x="6793992" y="4603090"/>
-            <a:ext cx="4754880" cy="665683"/>
+            <a:off x="7450531" y="5212080"/>
+            <a:ext cx="1797710" cy="868680"/>
           </a:xfrm>
           <a:prstGeom prst="rect">
             <a:avLst/>
@@ -10095,7 +10349,7 @@
               <a:buNone/>
             </a:pPr>
             <a:r>
-              <a:rPr lang="ko-KR" altLang="en-US" sz="1900" b="1" dirty="0">
+              <a:rPr lang="ko-KR" altLang="en-US" sz="1700" b="1" dirty="0">
                 <a:solidFill>
                   <a:srgbClr val="FFFFFF"/>
                 </a:solidFill>
@@ -10106,7 +10360,7 @@
               <a:t>아니요</a:t>
             </a:r>
             <a:r>
-              <a:rPr lang="en-US" sz="1900" b="1" dirty="0">
+              <a:rPr lang="en-US" sz="1700" b="1" dirty="0">
                 <a:solidFill>
                   <a:srgbClr val="FFFFFF"/>
                 </a:solidFill>
@@ -10114,7 +10368,7 @@
               <a:t>, </a:t>
             </a:r>
             <a:r>
-              <a:rPr lang="ko-KR" altLang="en-US" sz="1900" b="1" dirty="0">
+              <a:rPr lang="ko-KR" altLang="en-US" sz="1700" b="1" dirty="0">
                 <a:solidFill>
                   <a:srgbClr val="FFFFFF"/>
                 </a:solidFill>
@@ -10125,7 +10379,7 @@
               <a:t>우유가 아니에요</a:t>
             </a:r>
             <a:r>
-              <a:rPr lang="en-US" sz="1900" b="1" dirty="0">
+              <a:rPr lang="en-US" sz="1700" b="1" dirty="0">
                 <a:solidFill>
                   <a:srgbClr val="FFFFFF"/>
                 </a:solidFill>
@@ -10133,7 +10387,7 @@
               <a:t>. </a:t>
             </a:r>
             <a:r>
-              <a:rPr lang="ko-KR" altLang="en-US" sz="1900" b="1" dirty="0">
+              <a:rPr lang="ko-KR" altLang="en-US" sz="1700" b="1" dirty="0">
                 <a:solidFill>
                   <a:srgbClr val="FFFFFF"/>
                 </a:solidFill>
@@ -10144,27 +10398,85 @@
               <a:t>커피예요</a:t>
             </a:r>
             <a:r>
-              <a:rPr lang="en-US" sz="1900" b="1" dirty="0">
+              <a:rPr lang="en-US" sz="1700" b="1" dirty="0">
                 <a:solidFill>
                   <a:srgbClr val="FFFFFF"/>
                 </a:solidFill>
               </a:rPr>
               <a:t>.</a:t>
             </a:r>
-            <a:endParaRPr lang="en-US" sz="1900" dirty="0"/>
-          </a:p>
-        </p:txBody>
-      </p:sp>
-      <p:sp>
-        <p:nvSpPr>
-          <p:cNvPr id="24" name="num_4"/>
+            <a:endParaRPr lang="en-US" sz="1700" dirty="0"/>
+          </a:p>
+        </p:txBody>
+      </p:sp>
+      <p:sp>
+        <p:nvSpPr>
+          <p:cNvPr id="32" name="card_4"/>
           <p:cNvSpPr/>
           <p:nvPr/>
         </p:nvSpPr>
         <p:spPr>
           <a:xfrm>
-            <a:off x="548640" y="5574182"/>
-            <a:ext cx="457200" cy="457200"/>
+            <a:off x="9568282" y="1965960"/>
+            <a:ext cx="2072030" cy="4206240"/>
+          </a:xfrm>
+          <a:prstGeom prst="roundRect">
+            <a:avLst>
+              <a:gd name="adj" fmla="val 6620"/>
+            </a:avLst>
+          </a:prstGeom>
+          <a:solidFill>
+            <a:srgbClr val="FFFFFF"/>
+          </a:solidFill>
+          <a:ln w="12700">
+            <a:solidFill>
+              <a:srgbClr val="D9D7F7"/>
+            </a:solidFill>
+            <a:prstDash val="solid"/>
+          </a:ln>
+          <a:effectLst>
+            <a:outerShdw blurRad="76200" dist="25400" dir="5400000" algn="bl" rotWithShape="0">
+              <a:srgbClr val="14142B">
+                <a:alpha val="12000"/>
+              </a:srgbClr>
+            </a:outerShdw>
+          </a:effectLst>
+        </p:spPr>
+      </p:sp>
+      <p:pic>
+        <p:nvPicPr>
+          <p:cNvPr id="33" name="item_img_4" descr="C:\Users\Chingu\AppData\Local\Temp\claude\C--Users-Chingu-Desktop-ACADEMIASEULWEB\d4111e1b-5523-44ea-97b2-b1a1d9545b9e\scratchpad\decks\cache\img_50a8840769af4248.png"/>
+          <p:cNvPicPr>
+            <a:picLocks noChangeAspect="1"/>
+          </p:cNvPicPr>
+          <p:nvPr/>
+        </p:nvPicPr>
+        <p:blipFill>
+          <a:blip r:embed="rId7"/>
+          <a:stretch>
+            <a:fillRect/>
+          </a:stretch>
+        </p:blipFill>
+        <p:spPr>
+          <a:xfrm>
+            <a:off x="9689897" y="2057400"/>
+            <a:ext cx="1828800" cy="1828800"/>
+          </a:xfrm>
+          <a:prstGeom prst="rect">
+            <a:avLst/>
+          </a:prstGeom>
+        </p:spPr>
+      </p:pic>
+      <p:sp>
+        <p:nvSpPr>
+          <p:cNvPr id="34" name="num_4"/>
+          <p:cNvSpPr/>
+          <p:nvPr/>
+        </p:nvSpPr>
+        <p:spPr>
+          <a:xfrm>
+            <a:off x="9659722" y="2057400"/>
+            <a:ext cx="420624" cy="420624"/>
           </a:xfrm>
           <a:prstGeom prst="ellipse">
             <a:avLst/>
@@ -10172,9 +10484,9 @@
           <a:solidFill>
             <a:srgbClr val="003478"/>
           </a:solidFill>
-          <a:ln w="12700">
+          <a:ln w="19050">
             <a:solidFill>
-              <a:srgbClr val="003478"/>
+              <a:srgbClr val="FFFFFF"/>
             </a:solidFill>
             <a:prstDash val="solid"/>
           </a:ln>
@@ -10182,14 +10494,14 @@
       </p:sp>
       <p:sp>
         <p:nvSpPr>
-          <p:cNvPr id="25" name="Text 23"/>
+          <p:cNvPr id="35" name="Text 28"/>
           <p:cNvSpPr txBox="1"/>
           <p:nvPr/>
         </p:nvSpPr>
         <p:spPr>
           <a:xfrm>
-            <a:off x="548640" y="5574182"/>
-            <a:ext cx="457200" cy="457200"/>
+            <a:off x="9659722" y="2057400"/>
+            <a:ext cx="420624" cy="420624"/>
           </a:xfrm>
           <a:prstGeom prst="rect">
             <a:avLst/>
@@ -10207,27 +10519,27 @@
               <a:buNone/>
             </a:pPr>
             <a:r>
-              <a:rPr lang="en-US" sz="1600" b="1" dirty="0">
+              <a:rPr lang="en-US" sz="1500" b="1" dirty="0">
                 <a:solidFill>
                   <a:srgbClr val="FFFFFF"/>
                 </a:solidFill>
               </a:rPr>
               <a:t>5</a:t>
             </a:r>
-            <a:endParaRPr lang="en-US" sz="1600" dirty="0"/>
-          </a:p>
-        </p:txBody>
-      </p:sp>
-      <p:sp>
-        <p:nvSpPr>
-          <p:cNvPr id="26" name="Text 24"/>
+            <a:endParaRPr lang="en-US" sz="1500" dirty="0"/>
+          </a:p>
+        </p:txBody>
+      </p:sp>
+      <p:sp>
+        <p:nvSpPr>
+          <p:cNvPr id="36" name="Text 29"/>
           <p:cNvSpPr txBox="1"/>
           <p:nvPr/>
         </p:nvSpPr>
         <p:spPr>
           <a:xfrm>
-            <a:off x="1188720" y="5433365"/>
-            <a:ext cx="5285232" cy="738835"/>
+            <a:off x="9659722" y="3931920"/>
+            <a:ext cx="1889150" cy="1234440"/>
           </a:xfrm>
           <a:prstGeom prst="rect">
             <a:avLst/>
@@ -10241,11 +10553,11 @@
           </a:bodyPr>
           <a:lstStyle/>
           <a:p>
-            <a:pPr marL="0" indent="0" eaLnBrk="1">
+            <a:pPr marL="0" indent="0" algn="ctr" eaLnBrk="1">
               <a:buNone/>
             </a:pPr>
             <a:r>
-              <a:rPr lang="ko-KR" altLang="en-US" sz="2400" dirty="0">
+              <a:rPr lang="ko-KR" altLang="en-US" sz="2200" dirty="0">
                 <a:solidFill>
                   <a:srgbClr val="14142B"/>
                 </a:solidFill>
@@ -10256,31 +10568,31 @@
               <a:t>(plato de arroz) 김치예요</a:t>
             </a:r>
             <a:r>
-              <a:rPr lang="en-US" sz="2400" dirty="0">
+              <a:rPr lang="en-US" sz="2200" dirty="0">
                 <a:solidFill>
                   <a:srgbClr val="14142B"/>
                 </a:solidFill>
               </a:rPr>
               <a:t>?</a:t>
             </a:r>
-            <a:endParaRPr lang="en-US" sz="2400" dirty="0"/>
-          </a:p>
-        </p:txBody>
-      </p:sp>
-      <p:sp>
-        <p:nvSpPr>
-          <p:cNvPr id="27" name="rev_10_caja"/>
+            <a:endParaRPr lang="en-US" sz="2200" dirty="0"/>
+          </a:p>
+        </p:txBody>
+      </p:sp>
+      <p:sp>
+        <p:nvSpPr>
+          <p:cNvPr id="37" name="rev_10_caja"/>
           <p:cNvSpPr/>
           <p:nvPr/>
         </p:nvSpPr>
         <p:spPr>
           <a:xfrm>
-            <a:off x="6702552" y="5469941"/>
-            <a:ext cx="4937760" cy="665683"/>
+            <a:off x="9678010" y="5212080"/>
+            <a:ext cx="1852574" cy="868680"/>
           </a:xfrm>
           <a:prstGeom prst="roundRect">
             <a:avLst>
-              <a:gd name="adj" fmla="val 16484"/>
+              <a:gd name="adj" fmla="val 12632"/>
             </a:avLst>
           </a:prstGeom>
           <a:solidFill>
@@ -10296,14 +10608,14 @@
       </p:sp>
       <p:sp>
         <p:nvSpPr>
-          <p:cNvPr id="28" name="rev_10_txt"/>
+          <p:cNvPr id="38" name="rev_10_txt"/>
           <p:cNvSpPr txBox="1"/>
           <p:nvPr/>
         </p:nvSpPr>
         <p:spPr>
           <a:xfrm>
-            <a:off x="6793992" y="5469941"/>
-            <a:ext cx="4754880" cy="665683"/>
+            <a:off x="9705442" y="5212080"/>
+            <a:ext cx="1797710" cy="868680"/>
           </a:xfrm>
           <a:prstGeom prst="rect">
             <a:avLst/>
@@ -10321,7 +10633,7 @@
               <a:buNone/>
             </a:pPr>
             <a:r>
-              <a:rPr lang="ko-KR" altLang="en-US" sz="1900" b="1" dirty="0">
+              <a:rPr lang="ko-KR" altLang="en-US" sz="1700" b="1" dirty="0">
                 <a:solidFill>
                   <a:srgbClr val="FFFFFF"/>
                 </a:solidFill>
@@ -10332,7 +10644,7 @@
               <a:t>아니요</a:t>
             </a:r>
             <a:r>
-              <a:rPr lang="en-US" sz="1900" b="1" dirty="0">
+              <a:rPr lang="en-US" sz="1700" b="1" dirty="0">
                 <a:solidFill>
                   <a:srgbClr val="FFFFFF"/>
                 </a:solidFill>
@@ -10340,7 +10652,7 @@
               <a:t>, </a:t>
             </a:r>
             <a:r>
-              <a:rPr lang="ko-KR" altLang="en-US" sz="1900" b="1" dirty="0">
+              <a:rPr lang="ko-KR" altLang="en-US" sz="1700" b="1" dirty="0">
                 <a:solidFill>
                   <a:srgbClr val="FFFFFF"/>
                 </a:solidFill>
@@ -10351,7 +10663,7 @@
               <a:t>김치가 아니에요</a:t>
             </a:r>
             <a:r>
-              <a:rPr lang="en-US" sz="1900" b="1" dirty="0">
+              <a:rPr lang="en-US" sz="1700" b="1" dirty="0">
                 <a:solidFill>
                   <a:srgbClr val="FFFFFF"/>
                 </a:solidFill>
@@ -10359,7 +10671,7 @@
               <a:t>. </a:t>
             </a:r>
             <a:r>
-              <a:rPr lang="ko-KR" altLang="en-US" sz="1900" b="1" dirty="0">
+              <a:rPr lang="ko-KR" altLang="en-US" sz="1700" b="1" dirty="0">
                 <a:solidFill>
                   <a:srgbClr val="FFFFFF"/>
                 </a:solidFill>
@@ -10370,20 +10682,20 @@
               <a:t>밥이에요</a:t>
             </a:r>
             <a:r>
-              <a:rPr lang="en-US" sz="1900" b="1" dirty="0">
+              <a:rPr lang="en-US" sz="1700" b="1" dirty="0">
                 <a:solidFill>
                   <a:srgbClr val="FFFFFF"/>
                 </a:solidFill>
               </a:rPr>
               <a:t>.</a:t>
             </a:r>
-            <a:endParaRPr lang="en-US" sz="1900" dirty="0"/>
-          </a:p>
-        </p:txBody>
-      </p:sp>
-      <p:sp>
-        <p:nvSpPr>
-          <p:cNvPr id="29" name="Slide Number Placeholder 0"/>
+            <a:endParaRPr lang="en-US" sz="1700" dirty="0"/>
+          </a:p>
+        </p:txBody>
+      </p:sp>
+      <p:sp>
+        <p:nvSpPr>
+          <p:cNvPr id="39" name="Slide Number Placeholder 0"/>
           <p:cNvSpPr>
             <a:spLocks noGrp="1"/>
           </p:cNvSpPr>
@@ -10468,7 +10780,7 @@
                                           </p:stCondLst>
                                         </p:cTn>
                                         <p:tgtEl>
-                                          <p:spTgt spid="7"/>
+                                          <p:spTgt spid="9"/>
                                         </p:tgtEl>
                                         <p:attrNameLst>
                                           <p:attrName>style.visibility</p:attrName>
@@ -10495,7 +10807,7 @@
                                           </p:stCondLst>
                                         </p:cTn>
                                         <p:tgtEl>
-                                          <p:spTgt spid="8"/>
+                                          <p:spTgt spid="10"/>
                                         </p:tgtEl>
                                         <p:attrNameLst>
                                           <p:attrName>style.visibility</p:attrName>
@@ -10540,7 +10852,7 @@
                                           </p:stCondLst>
                                         </p:cTn>
                                         <p:tgtEl>
-                                          <p:spTgt spid="12"/>
+                                          <p:spTgt spid="16"/>
                                         </p:tgtEl>
                                         <p:attrNameLst>
                                           <p:attrName>style.visibility</p:attrName>
@@ -10567,7 +10879,7 @@
                                           </p:stCondLst>
                                         </p:cTn>
                                         <p:tgtEl>
-                                          <p:spTgt spid="13"/>
+                                          <p:spTgt spid="17"/>
                                         </p:tgtEl>
                                         <p:attrNameLst>
                                           <p:attrName>style.visibility</p:attrName>
@@ -10612,7 +10924,7 @@
                                           </p:stCondLst>
                                         </p:cTn>
                                         <p:tgtEl>
-                                          <p:spTgt spid="17"/>
+                                          <p:spTgt spid="23"/>
                                         </p:tgtEl>
                                         <p:attrNameLst>
                                           <p:attrName>style.visibility</p:attrName>
@@ -10639,7 +10951,7 @@
                                           </p:stCondLst>
                                         </p:cTn>
                                         <p:tgtEl>
-                                          <p:spTgt spid="18"/>
+                                          <p:spTgt spid="24"/>
                                         </p:tgtEl>
                                         <p:attrNameLst>
                                           <p:attrName>style.visibility</p:attrName>
@@ -10684,7 +10996,7 @@
                                           </p:stCondLst>
                                         </p:cTn>
                                         <p:tgtEl>
-                                          <p:spTgt spid="22"/>
+                                          <p:spTgt spid="30"/>
                                         </p:tgtEl>
                                         <p:attrNameLst>
                                           <p:attrName>style.visibility</p:attrName>
@@ -10711,7 +11023,7 @@
                                           </p:stCondLst>
                                         </p:cTn>
                                         <p:tgtEl>
-                                          <p:spTgt spid="23"/>
+                                          <p:spTgt spid="31"/>
                                         </p:tgtEl>
                                         <p:attrNameLst>
                                           <p:attrName>style.visibility</p:attrName>
@@ -10756,7 +11068,7 @@
                                           </p:stCondLst>
                                         </p:cTn>
                                         <p:tgtEl>
-                                          <p:spTgt spid="27"/>
+                                          <p:spTgt spid="37"/>
                                         </p:tgtEl>
                                         <p:attrNameLst>
                                           <p:attrName>style.visibility</p:attrName>
@@ -10783,7 +11095,7 @@
                                           </p:stCondLst>
                                         </p:cTn>
                                         <p:tgtEl>
-                                          <p:spTgt spid="28"/>
+                                          <p:spTgt spid="38"/>
                                         </p:tgtEl>
                                         <p:attrNameLst>
                                           <p:attrName>style.visibility</p:attrName>
@@ -10824,11 +11136,11 @@
       </p:par>
     </p:tnLst>
     <p:bldLst>
-      <p:bldP spid="8" grpId="0" animBg="1"/>
-      <p:bldP spid="13" grpId="0" animBg="1"/>
-      <p:bldP spid="18" grpId="0" animBg="1"/>
-      <p:bldP spid="23" grpId="0" animBg="1"/>
-      <p:bldP spid="28" grpId="0" animBg="1"/>
+      <p:bldP spid="10" grpId="0" animBg="1"/>
+      <p:bldP spid="17" grpId="0" animBg="1"/>
+      <p:bldP spid="24" grpId="0" animBg="1"/>
+      <p:bldP spid="31" grpId="0" animBg="1"/>
+      <p:bldP spid="38" grpId="0" animBg="1"/>
     </p:bldLst>
   </p:timing>
 </p:sld>
@@ -10908,7 +11220,7 @@
         <p:spPr>
           <a:xfrm>
             <a:off x="548640" y="1325880"/>
-            <a:ext cx="11064240" cy="548640"/>
+            <a:ext cx="11091672" cy="548640"/>
           </a:xfrm>
           <a:prstGeom prst="rect">
             <a:avLst/>
@@ -10939,14 +11251,72 @@
       </p:sp>
       <p:sp>
         <p:nvSpPr>
-          <p:cNvPr id="4" name="num_0"/>
+          <p:cNvPr id="4" name="card_0"/>
           <p:cNvSpPr/>
           <p:nvPr/>
         </p:nvSpPr>
         <p:spPr>
           <a:xfrm>
-            <a:off x="548640" y="2106778"/>
-            <a:ext cx="457200" cy="457200"/>
+            <a:off x="548640" y="1965960"/>
+            <a:ext cx="2072030" cy="4206240"/>
+          </a:xfrm>
+          <a:prstGeom prst="roundRect">
+            <a:avLst>
+              <a:gd name="adj" fmla="val 6620"/>
+            </a:avLst>
+          </a:prstGeom>
+          <a:solidFill>
+            <a:srgbClr val="FFFFFF"/>
+          </a:solidFill>
+          <a:ln w="12700">
+            <a:solidFill>
+              <a:srgbClr val="D9D7F7"/>
+            </a:solidFill>
+            <a:prstDash val="solid"/>
+          </a:ln>
+          <a:effectLst>
+            <a:outerShdw blurRad="76200" dist="25400" dir="5400000" algn="bl" rotWithShape="0">
+              <a:srgbClr val="14142B">
+                <a:alpha val="12000"/>
+              </a:srgbClr>
+            </a:outerShdw>
+          </a:effectLst>
+        </p:spPr>
+      </p:sp>
+      <p:pic>
+        <p:nvPicPr>
+          <p:cNvPr id="5" name="item_img_0" descr="C:\Users\Chingu\AppData\Local\Temp\claude\C--Users-Chingu-Desktop-ACADEMIASEULWEB\d4111e1b-5523-44ea-97b2-b1a1d9545b9e\scratchpad\decks\cache\img_661c4215b15fcc25.png"/>
+          <p:cNvPicPr>
+            <a:picLocks noChangeAspect="1"/>
+          </p:cNvPicPr>
+          <p:nvPr/>
+        </p:nvPicPr>
+        <p:blipFill>
+          <a:blip r:embed="rId3"/>
+          <a:stretch>
+            <a:fillRect/>
+          </a:stretch>
+        </p:blipFill>
+        <p:spPr>
+          <a:xfrm>
+            <a:off x="670255" y="2057400"/>
+            <a:ext cx="1828800" cy="1828800"/>
+          </a:xfrm>
+          <a:prstGeom prst="rect">
+            <a:avLst/>
+          </a:prstGeom>
+        </p:spPr>
+      </p:pic>
+      <p:sp>
+        <p:nvSpPr>
+          <p:cNvPr id="6" name="num_0"/>
+          <p:cNvSpPr/>
+          <p:nvPr/>
+        </p:nvSpPr>
+        <p:spPr>
+          <a:xfrm>
+            <a:off x="640080" y="2057400"/>
+            <a:ext cx="420624" cy="420624"/>
           </a:xfrm>
           <a:prstGeom prst="ellipse">
             <a:avLst/>
@@ -10954,9 +11324,9 @@
           <a:solidFill>
             <a:srgbClr val="003478"/>
           </a:solidFill>
-          <a:ln w="12700">
+          <a:ln w="19050">
             <a:solidFill>
-              <a:srgbClr val="003478"/>
+              <a:srgbClr val="FFFFFF"/>
             </a:solidFill>
             <a:prstDash val="solid"/>
           </a:ln>
@@ -10964,14 +11334,14 @@
       </p:sp>
       <p:sp>
         <p:nvSpPr>
-          <p:cNvPr id="5" name="Text 3"/>
+          <p:cNvPr id="7" name="Text 4"/>
           <p:cNvSpPr txBox="1"/>
           <p:nvPr/>
         </p:nvSpPr>
         <p:spPr>
           <a:xfrm>
-            <a:off x="548640" y="2106778"/>
-            <a:ext cx="457200" cy="457200"/>
+            <a:off x="640080" y="2057400"/>
+            <a:ext cx="420624" cy="420624"/>
           </a:xfrm>
           <a:prstGeom prst="rect">
             <a:avLst/>
@@ -10989,27 +11359,27 @@
               <a:buNone/>
             </a:pPr>
             <a:r>
-              <a:rPr lang="en-US" sz="1600" b="1" dirty="0">
+              <a:rPr lang="en-US" sz="1500" b="1" dirty="0">
                 <a:solidFill>
                   <a:srgbClr val="FFFFFF"/>
                 </a:solidFill>
               </a:rPr>
               <a:t>6</a:t>
             </a:r>
-            <a:endParaRPr lang="en-US" sz="1600" dirty="0"/>
-          </a:p>
-        </p:txBody>
-      </p:sp>
-      <p:sp>
-        <p:nvSpPr>
-          <p:cNvPr id="6" name="Text 4"/>
+            <a:endParaRPr lang="en-US" sz="1500" dirty="0"/>
+          </a:p>
+        </p:txBody>
+      </p:sp>
+      <p:sp>
+        <p:nvSpPr>
+          <p:cNvPr id="8" name="Text 5"/>
           <p:cNvSpPr txBox="1"/>
           <p:nvPr/>
         </p:nvSpPr>
         <p:spPr>
           <a:xfrm>
-            <a:off x="1188720" y="1965960"/>
-            <a:ext cx="5285232" cy="738835"/>
+            <a:off x="640080" y="3931920"/>
+            <a:ext cx="1889150" cy="1234440"/>
           </a:xfrm>
           <a:prstGeom prst="rect">
             <a:avLst/>
@@ -11023,11 +11393,11 @@
           </a:bodyPr>
           <a:lstStyle/>
           <a:p>
-            <a:pPr marL="0" indent="0" eaLnBrk="1">
+            <a:pPr marL="0" indent="0" algn="ctr" eaLnBrk="1">
               <a:buNone/>
             </a:pPr>
             <a:r>
-              <a:rPr lang="ko-KR" altLang="en-US" sz="2400" dirty="0">
+              <a:rPr lang="ko-KR" altLang="en-US" sz="2000" dirty="0">
                 <a:solidFill>
                   <a:srgbClr val="14142B"/>
                 </a:solidFill>
@@ -11038,31 +11408,31 @@
               <a:t>(silla) 의자예요</a:t>
             </a:r>
             <a:r>
-              <a:rPr lang="en-US" sz="2400" dirty="0">
+              <a:rPr lang="en-US" sz="2000" dirty="0">
                 <a:solidFill>
                   <a:srgbClr val="14142B"/>
                 </a:solidFill>
               </a:rPr>
               <a:t>?</a:t>
             </a:r>
-            <a:endParaRPr lang="en-US" sz="2400" dirty="0"/>
-          </a:p>
-        </p:txBody>
-      </p:sp>
-      <p:sp>
-        <p:nvSpPr>
-          <p:cNvPr id="7" name="rev_11_caja"/>
+            <a:endParaRPr lang="en-US" sz="2000" dirty="0"/>
+          </a:p>
+        </p:txBody>
+      </p:sp>
+      <p:sp>
+        <p:nvSpPr>
+          <p:cNvPr id="9" name="rev_11_caja"/>
           <p:cNvSpPr/>
           <p:nvPr/>
         </p:nvSpPr>
         <p:spPr>
           <a:xfrm>
-            <a:off x="6702552" y="2002536"/>
-            <a:ext cx="4937760" cy="665683"/>
+            <a:off x="658368" y="5212080"/>
+            <a:ext cx="1852574" cy="868680"/>
           </a:xfrm>
           <a:prstGeom prst="roundRect">
             <a:avLst>
-              <a:gd name="adj" fmla="val 16484"/>
+              <a:gd name="adj" fmla="val 12632"/>
             </a:avLst>
           </a:prstGeom>
           <a:solidFill>
@@ -11078,14 +11448,14 @@
       </p:sp>
       <p:sp>
         <p:nvSpPr>
-          <p:cNvPr id="8" name="rev_11_txt"/>
+          <p:cNvPr id="10" name="rev_11_txt"/>
           <p:cNvSpPr txBox="1"/>
           <p:nvPr/>
         </p:nvSpPr>
         <p:spPr>
           <a:xfrm>
-            <a:off x="6793992" y="2002536"/>
-            <a:ext cx="4754880" cy="665683"/>
+            <a:off x="685800" y="5212080"/>
+            <a:ext cx="1797710" cy="868680"/>
           </a:xfrm>
           <a:prstGeom prst="rect">
             <a:avLst/>
@@ -11103,7 +11473,7 @@
               <a:buNone/>
             </a:pPr>
             <a:r>
-              <a:rPr lang="ko-KR" altLang="en-US" sz="2200" b="1" dirty="0">
+              <a:rPr lang="ko-KR" altLang="en-US" sz="1700" b="1" dirty="0">
                 <a:solidFill>
                   <a:srgbClr val="FFFFFF"/>
                 </a:solidFill>
@@ -11114,7 +11484,7 @@
               <a:t>네</a:t>
             </a:r>
             <a:r>
-              <a:rPr lang="en-US" sz="2200" b="1" dirty="0">
+              <a:rPr lang="en-US" sz="1700" b="1" dirty="0">
                 <a:solidFill>
                   <a:srgbClr val="FFFFFF"/>
                 </a:solidFill>
@@ -11122,7 +11492,7 @@
               <a:t>, </a:t>
             </a:r>
             <a:r>
-              <a:rPr lang="ko-KR" altLang="en-US" sz="2200" b="1" dirty="0">
+              <a:rPr lang="ko-KR" altLang="en-US" sz="1700" b="1" dirty="0">
                 <a:solidFill>
                   <a:srgbClr val="FFFFFF"/>
                 </a:solidFill>
@@ -11133,27 +11503,85 @@
               <a:t>의자예요</a:t>
             </a:r>
             <a:r>
-              <a:rPr lang="en-US" sz="2200" b="1" dirty="0">
+              <a:rPr lang="en-US" sz="1700" b="1" dirty="0">
                 <a:solidFill>
                   <a:srgbClr val="FFFFFF"/>
                 </a:solidFill>
               </a:rPr>
               <a:t>.</a:t>
             </a:r>
-            <a:endParaRPr lang="en-US" sz="2200" dirty="0"/>
-          </a:p>
-        </p:txBody>
-      </p:sp>
-      <p:sp>
-        <p:nvSpPr>
-          <p:cNvPr id="9" name="num_1"/>
+            <a:endParaRPr lang="en-US" sz="1700" dirty="0"/>
+          </a:p>
+        </p:txBody>
+      </p:sp>
+      <p:sp>
+        <p:nvSpPr>
+          <p:cNvPr id="11" name="card_1"/>
           <p:cNvSpPr/>
           <p:nvPr/>
         </p:nvSpPr>
         <p:spPr>
           <a:xfrm>
-            <a:off x="548640" y="2973629"/>
-            <a:ext cx="457200" cy="457200"/>
+            <a:off x="2803550" y="1965960"/>
+            <a:ext cx="2072030" cy="4206240"/>
+          </a:xfrm>
+          <a:prstGeom prst="roundRect">
+            <a:avLst>
+              <a:gd name="adj" fmla="val 6620"/>
+            </a:avLst>
+          </a:prstGeom>
+          <a:solidFill>
+            <a:srgbClr val="FFFFFF"/>
+          </a:solidFill>
+          <a:ln w="12700">
+            <a:solidFill>
+              <a:srgbClr val="D9D7F7"/>
+            </a:solidFill>
+            <a:prstDash val="solid"/>
+          </a:ln>
+          <a:effectLst>
+            <a:outerShdw blurRad="76200" dist="25400" dir="5400000" algn="bl" rotWithShape="0">
+              <a:srgbClr val="14142B">
+                <a:alpha val="12000"/>
+              </a:srgbClr>
+            </a:outerShdw>
+          </a:effectLst>
+        </p:spPr>
+      </p:sp>
+      <p:pic>
+        <p:nvPicPr>
+          <p:cNvPr id="12" name="item_img_1" descr="C:\Users\Chingu\AppData\Local\Temp\claude\C--Users-Chingu-Desktop-ACADEMIASEULWEB\d4111e1b-5523-44ea-97b2-b1a1d9545b9e\scratchpad\decks\cache\img_03731e08908ff8d0.png"/>
+          <p:cNvPicPr>
+            <a:picLocks noChangeAspect="1"/>
+          </p:cNvPicPr>
+          <p:nvPr/>
+        </p:nvPicPr>
+        <p:blipFill>
+          <a:blip r:embed="rId4"/>
+          <a:stretch>
+            <a:fillRect/>
+          </a:stretch>
+        </p:blipFill>
+        <p:spPr>
+          <a:xfrm>
+            <a:off x="2925166" y="2057400"/>
+            <a:ext cx="1828800" cy="1828800"/>
+          </a:xfrm>
+          <a:prstGeom prst="rect">
+            <a:avLst/>
+          </a:prstGeom>
+        </p:spPr>
+      </p:pic>
+      <p:sp>
+        <p:nvSpPr>
+          <p:cNvPr id="13" name="num_1"/>
+          <p:cNvSpPr/>
+          <p:nvPr/>
+        </p:nvSpPr>
+        <p:spPr>
+          <a:xfrm>
+            <a:off x="2894990" y="2057400"/>
+            <a:ext cx="420624" cy="420624"/>
           </a:xfrm>
           <a:prstGeom prst="ellipse">
             <a:avLst/>
@@ -11161,9 +11589,9 @@
           <a:solidFill>
             <a:srgbClr val="003478"/>
           </a:solidFill>
-          <a:ln w="12700">
+          <a:ln w="19050">
             <a:solidFill>
-              <a:srgbClr val="003478"/>
+              <a:srgbClr val="FFFFFF"/>
             </a:solidFill>
             <a:prstDash val="solid"/>
           </a:ln>
@@ -11171,14 +11599,14 @@
       </p:sp>
       <p:sp>
         <p:nvSpPr>
-          <p:cNvPr id="10" name="Text 8"/>
+          <p:cNvPr id="14" name="Text 10"/>
           <p:cNvSpPr txBox="1"/>
           <p:nvPr/>
         </p:nvSpPr>
         <p:spPr>
           <a:xfrm>
-            <a:off x="548640" y="2973629"/>
-            <a:ext cx="457200" cy="457200"/>
+            <a:off x="2894990" y="2057400"/>
+            <a:ext cx="420624" cy="420624"/>
           </a:xfrm>
           <a:prstGeom prst="rect">
             <a:avLst/>
@@ -11196,27 +11624,27 @@
               <a:buNone/>
             </a:pPr>
             <a:r>
-              <a:rPr lang="en-US" sz="1600" b="1" dirty="0">
+              <a:rPr lang="en-US" sz="1500" b="1" dirty="0">
                 <a:solidFill>
                   <a:srgbClr val="FFFFFF"/>
                 </a:solidFill>
               </a:rPr>
               <a:t>7</a:t>
             </a:r>
-            <a:endParaRPr lang="en-US" sz="1600" dirty="0"/>
-          </a:p>
-        </p:txBody>
-      </p:sp>
-      <p:sp>
-        <p:nvSpPr>
-          <p:cNvPr id="11" name="Text 9"/>
+            <a:endParaRPr lang="en-US" sz="1500" dirty="0"/>
+          </a:p>
+        </p:txBody>
+      </p:sp>
+      <p:sp>
+        <p:nvSpPr>
+          <p:cNvPr id="15" name="Text 11"/>
           <p:cNvSpPr txBox="1"/>
           <p:nvPr/>
         </p:nvSpPr>
         <p:spPr>
           <a:xfrm>
-            <a:off x="1188720" y="2832811"/>
-            <a:ext cx="5285232" cy="738835"/>
+            <a:off x="2894990" y="3931920"/>
+            <a:ext cx="1889150" cy="1234440"/>
           </a:xfrm>
           <a:prstGeom prst="rect">
             <a:avLst/>
@@ -11230,11 +11658,11 @@
           </a:bodyPr>
           <a:lstStyle/>
           <a:p>
-            <a:pPr marL="0" indent="0" eaLnBrk="1">
+            <a:pPr marL="0" indent="0" algn="ctr" eaLnBrk="1">
               <a:buNone/>
             </a:pPr>
             <a:r>
-              <a:rPr lang="ko-KR" altLang="en-US" sz="2400" dirty="0">
+              <a:rPr lang="ko-KR" altLang="en-US" sz="2000" dirty="0">
                 <a:solidFill>
                   <a:srgbClr val="14142B"/>
                 </a:solidFill>
@@ -11245,31 +11673,31 @@
               <a:t>(gorro) 구두예요</a:t>
             </a:r>
             <a:r>
-              <a:rPr lang="en-US" sz="2400" dirty="0">
+              <a:rPr lang="en-US" sz="2000" dirty="0">
                 <a:solidFill>
                   <a:srgbClr val="14142B"/>
                 </a:solidFill>
               </a:rPr>
               <a:t>?</a:t>
             </a:r>
-            <a:endParaRPr lang="en-US" sz="2400" dirty="0"/>
-          </a:p>
-        </p:txBody>
-      </p:sp>
-      <p:sp>
-        <p:nvSpPr>
-          <p:cNvPr id="12" name="rev_12_caja"/>
+            <a:endParaRPr lang="en-US" sz="2000" dirty="0"/>
+          </a:p>
+        </p:txBody>
+      </p:sp>
+      <p:sp>
+        <p:nvSpPr>
+          <p:cNvPr id="16" name="rev_12_caja"/>
           <p:cNvSpPr/>
           <p:nvPr/>
         </p:nvSpPr>
         <p:spPr>
           <a:xfrm>
-            <a:off x="6702552" y="2869387"/>
-            <a:ext cx="4937760" cy="665683"/>
+            <a:off x="2913278" y="5212080"/>
+            <a:ext cx="1852574" cy="868680"/>
           </a:xfrm>
           <a:prstGeom prst="roundRect">
             <a:avLst>
-              <a:gd name="adj" fmla="val 16484"/>
+              <a:gd name="adj" fmla="val 12632"/>
             </a:avLst>
           </a:prstGeom>
           <a:solidFill>
@@ -11285,14 +11713,14 @@
       </p:sp>
       <p:sp>
         <p:nvSpPr>
-          <p:cNvPr id="13" name="rev_12_txt"/>
+          <p:cNvPr id="17" name="rev_12_txt"/>
           <p:cNvSpPr txBox="1"/>
           <p:nvPr/>
         </p:nvSpPr>
         <p:spPr>
           <a:xfrm>
-            <a:off x="6793992" y="2869387"/>
-            <a:ext cx="4754880" cy="665683"/>
+            <a:off x="2940710" y="5212080"/>
+            <a:ext cx="1797710" cy="868680"/>
           </a:xfrm>
           <a:prstGeom prst="rect">
             <a:avLst/>
@@ -11310,7 +11738,7 @@
               <a:buNone/>
             </a:pPr>
             <a:r>
-              <a:rPr lang="ko-KR" altLang="en-US" sz="1900" b="1" dirty="0">
+              <a:rPr lang="ko-KR" altLang="en-US" sz="1700" b="1" dirty="0">
                 <a:solidFill>
                   <a:srgbClr val="FFFFFF"/>
                 </a:solidFill>
@@ -11321,7 +11749,7 @@
               <a:t>아니요</a:t>
             </a:r>
             <a:r>
-              <a:rPr lang="en-US" sz="1900" b="1" dirty="0">
+              <a:rPr lang="en-US" sz="1700" b="1" dirty="0">
                 <a:solidFill>
                   <a:srgbClr val="FFFFFF"/>
                 </a:solidFill>
@@ -11329,7 +11757,7 @@
               <a:t>, </a:t>
             </a:r>
             <a:r>
-              <a:rPr lang="ko-KR" altLang="en-US" sz="1900" b="1" dirty="0">
+              <a:rPr lang="ko-KR" altLang="en-US" sz="1700" b="1" dirty="0">
                 <a:solidFill>
                   <a:srgbClr val="FFFFFF"/>
                 </a:solidFill>
@@ -11340,7 +11768,7 @@
               <a:t>구두가 아니에요</a:t>
             </a:r>
             <a:r>
-              <a:rPr lang="en-US" sz="1900" b="1" dirty="0">
+              <a:rPr lang="en-US" sz="1700" b="1" dirty="0">
                 <a:solidFill>
                   <a:srgbClr val="FFFFFF"/>
                 </a:solidFill>
@@ -11348,7 +11776,7 @@
               <a:t>. </a:t>
             </a:r>
             <a:r>
-              <a:rPr lang="ko-KR" altLang="en-US" sz="1900" b="1" dirty="0">
+              <a:rPr lang="ko-KR" altLang="en-US" sz="1700" b="1" dirty="0">
                 <a:solidFill>
                   <a:srgbClr val="FFFFFF"/>
                 </a:solidFill>
@@ -11359,27 +11787,85 @@
               <a:t>모자예요</a:t>
             </a:r>
             <a:r>
-              <a:rPr lang="en-US" sz="1900" b="1" dirty="0">
+              <a:rPr lang="en-US" sz="1700" b="1" dirty="0">
                 <a:solidFill>
                   <a:srgbClr val="FFFFFF"/>
                 </a:solidFill>
               </a:rPr>
               <a:t>.</a:t>
             </a:r>
-            <a:endParaRPr lang="en-US" sz="1900" dirty="0"/>
-          </a:p>
-        </p:txBody>
-      </p:sp>
-      <p:sp>
-        <p:nvSpPr>
-          <p:cNvPr id="14" name="num_2"/>
+            <a:endParaRPr lang="en-US" sz="1700" dirty="0"/>
+          </a:p>
+        </p:txBody>
+      </p:sp>
+      <p:sp>
+        <p:nvSpPr>
+          <p:cNvPr id="18" name="card_2"/>
           <p:cNvSpPr/>
           <p:nvPr/>
         </p:nvSpPr>
         <p:spPr>
           <a:xfrm>
-            <a:off x="548640" y="3840480"/>
-            <a:ext cx="457200" cy="457200"/>
+            <a:off x="5058461" y="1965960"/>
+            <a:ext cx="2072030" cy="4206240"/>
+          </a:xfrm>
+          <a:prstGeom prst="roundRect">
+            <a:avLst>
+              <a:gd name="adj" fmla="val 6620"/>
+            </a:avLst>
+          </a:prstGeom>
+          <a:solidFill>
+            <a:srgbClr val="FFFFFF"/>
+          </a:solidFill>
+          <a:ln w="12700">
+            <a:solidFill>
+              <a:srgbClr val="D9D7F7"/>
+            </a:solidFill>
+            <a:prstDash val="solid"/>
+          </a:ln>
+          <a:effectLst>
+            <a:outerShdw blurRad="76200" dist="25400" dir="5400000" algn="bl" rotWithShape="0">
+              <a:srgbClr val="14142B">
+                <a:alpha val="12000"/>
+              </a:srgbClr>
+            </a:outerShdw>
+          </a:effectLst>
+        </p:spPr>
+      </p:sp>
+      <p:pic>
+        <p:nvPicPr>
+          <p:cNvPr id="19" name="item_img_2" descr="C:\Users\Chingu\AppData\Local\Temp\claude\C--Users-Chingu-Desktop-ACADEMIASEULWEB\d4111e1b-5523-44ea-97b2-b1a1d9545b9e\scratchpad\decks\cache\img_36c83ca68b74cf51.png"/>
+          <p:cNvPicPr>
+            <a:picLocks noChangeAspect="1"/>
+          </p:cNvPicPr>
+          <p:nvPr/>
+        </p:nvPicPr>
+        <p:blipFill>
+          <a:blip r:embed="rId5"/>
+          <a:stretch>
+            <a:fillRect/>
+          </a:stretch>
+        </p:blipFill>
+        <p:spPr>
+          <a:xfrm>
+            <a:off x="5180076" y="2057400"/>
+            <a:ext cx="1828800" cy="1828800"/>
+          </a:xfrm>
+          <a:prstGeom prst="rect">
+            <a:avLst/>
+          </a:prstGeom>
+        </p:spPr>
+      </p:pic>
+      <p:sp>
+        <p:nvSpPr>
+          <p:cNvPr id="20" name="num_2"/>
+          <p:cNvSpPr/>
+          <p:nvPr/>
+        </p:nvSpPr>
+        <p:spPr>
+          <a:xfrm>
+            <a:off x="5149901" y="2057400"/>
+            <a:ext cx="420624" cy="420624"/>
           </a:xfrm>
           <a:prstGeom prst="ellipse">
             <a:avLst/>
@@ -11387,9 +11873,9 @@
           <a:solidFill>
             <a:srgbClr val="003478"/>
           </a:solidFill>
-          <a:ln w="12700">
+          <a:ln w="19050">
             <a:solidFill>
-              <a:srgbClr val="003478"/>
+              <a:srgbClr val="FFFFFF"/>
             </a:solidFill>
             <a:prstDash val="solid"/>
           </a:ln>
@@ -11397,14 +11883,14 @@
       </p:sp>
       <p:sp>
         <p:nvSpPr>
-          <p:cNvPr id="15" name="Text 13"/>
+          <p:cNvPr id="21" name="Text 16"/>
           <p:cNvSpPr txBox="1"/>
           <p:nvPr/>
         </p:nvSpPr>
         <p:spPr>
           <a:xfrm>
-            <a:off x="548640" y="3840480"/>
-            <a:ext cx="457200" cy="457200"/>
+            <a:off x="5149901" y="2057400"/>
+            <a:ext cx="420624" cy="420624"/>
           </a:xfrm>
           <a:prstGeom prst="rect">
             <a:avLst/>
@@ -11422,27 +11908,27 @@
               <a:buNone/>
             </a:pPr>
             <a:r>
-              <a:rPr lang="en-US" sz="1600" b="1" dirty="0">
+              <a:rPr lang="en-US" sz="1500" b="1" dirty="0">
                 <a:solidFill>
                   <a:srgbClr val="FFFFFF"/>
                 </a:solidFill>
               </a:rPr>
               <a:t>8</a:t>
             </a:r>
-            <a:endParaRPr lang="en-US" sz="1600" dirty="0"/>
-          </a:p>
-        </p:txBody>
-      </p:sp>
-      <p:sp>
-        <p:nvSpPr>
-          <p:cNvPr id="16" name="Text 14"/>
+            <a:endParaRPr lang="en-US" sz="1500" dirty="0"/>
+          </a:p>
+        </p:txBody>
+      </p:sp>
+      <p:sp>
+        <p:nvSpPr>
+          <p:cNvPr id="22" name="Text 17"/>
           <p:cNvSpPr txBox="1"/>
           <p:nvPr/>
         </p:nvSpPr>
         <p:spPr>
           <a:xfrm>
-            <a:off x="1188720" y="3699662"/>
-            <a:ext cx="5285232" cy="738835"/>
+            <a:off x="5149901" y="3931920"/>
+            <a:ext cx="1889150" cy="1234440"/>
           </a:xfrm>
           <a:prstGeom prst="rect">
             <a:avLst/>
@@ -11456,11 +11942,11 @@
           </a:bodyPr>
           <a:lstStyle/>
           <a:p>
-            <a:pPr marL="0" indent="0" eaLnBrk="1">
+            <a:pPr marL="0" indent="0" algn="ctr" eaLnBrk="1">
               <a:buNone/>
             </a:pPr>
             <a:r>
-              <a:rPr lang="ko-KR" altLang="en-US" sz="2400" dirty="0">
+              <a:rPr lang="ko-KR" altLang="en-US" sz="2000" dirty="0">
                 <a:solidFill>
                   <a:srgbClr val="14142B"/>
                 </a:solidFill>
@@ -11471,31 +11957,31 @@
               <a:t>(lápiz) 연필이에요</a:t>
             </a:r>
             <a:r>
-              <a:rPr lang="en-US" sz="2400" dirty="0">
+              <a:rPr lang="en-US" sz="2000" dirty="0">
                 <a:solidFill>
                   <a:srgbClr val="14142B"/>
                 </a:solidFill>
               </a:rPr>
               <a:t>?</a:t>
             </a:r>
-            <a:endParaRPr lang="en-US" sz="2400" dirty="0"/>
-          </a:p>
-        </p:txBody>
-      </p:sp>
-      <p:sp>
-        <p:nvSpPr>
-          <p:cNvPr id="17" name="rev_13_caja"/>
+            <a:endParaRPr lang="en-US" sz="2000" dirty="0"/>
+          </a:p>
+        </p:txBody>
+      </p:sp>
+      <p:sp>
+        <p:nvSpPr>
+          <p:cNvPr id="23" name="rev_13_caja"/>
           <p:cNvSpPr/>
           <p:nvPr/>
         </p:nvSpPr>
         <p:spPr>
           <a:xfrm>
-            <a:off x="6702552" y="3736238"/>
-            <a:ext cx="4937760" cy="665683"/>
+            <a:off x="5168189" y="5212080"/>
+            <a:ext cx="1852574" cy="868680"/>
           </a:xfrm>
           <a:prstGeom prst="roundRect">
             <a:avLst>
-              <a:gd name="adj" fmla="val 16484"/>
+              <a:gd name="adj" fmla="val 12632"/>
             </a:avLst>
           </a:prstGeom>
           <a:solidFill>
@@ -11511,14 +11997,14 @@
       </p:sp>
       <p:sp>
         <p:nvSpPr>
-          <p:cNvPr id="18" name="rev_13_txt"/>
+          <p:cNvPr id="24" name="rev_13_txt"/>
           <p:cNvSpPr txBox="1"/>
           <p:nvPr/>
         </p:nvSpPr>
         <p:spPr>
           <a:xfrm>
-            <a:off x="6793992" y="3736238"/>
-            <a:ext cx="4754880" cy="665683"/>
+            <a:off x="5195621" y="5212080"/>
+            <a:ext cx="1797710" cy="868680"/>
           </a:xfrm>
           <a:prstGeom prst="rect">
             <a:avLst/>
@@ -11536,7 +12022,7 @@
               <a:buNone/>
             </a:pPr>
             <a:r>
-              <a:rPr lang="ko-KR" altLang="en-US" sz="2200" b="1" dirty="0">
+              <a:rPr lang="ko-KR" altLang="en-US" sz="1700" b="1" dirty="0">
                 <a:solidFill>
                   <a:srgbClr val="FFFFFF"/>
                 </a:solidFill>
@@ -11547,7 +12033,7 @@
               <a:t>네</a:t>
             </a:r>
             <a:r>
-              <a:rPr lang="en-US" sz="2200" b="1" dirty="0">
+              <a:rPr lang="en-US" sz="1700" b="1" dirty="0">
                 <a:solidFill>
                   <a:srgbClr val="FFFFFF"/>
                 </a:solidFill>
@@ -11555,7 +12041,7 @@
               <a:t>, </a:t>
             </a:r>
             <a:r>
-              <a:rPr lang="ko-KR" altLang="en-US" sz="2200" b="1" dirty="0">
+              <a:rPr lang="ko-KR" altLang="en-US" sz="1700" b="1" dirty="0">
                 <a:solidFill>
                   <a:srgbClr val="FFFFFF"/>
                 </a:solidFill>
@@ -11566,27 +12052,85 @@
               <a:t>연필이에요</a:t>
             </a:r>
             <a:r>
-              <a:rPr lang="en-US" sz="2200" b="1" dirty="0">
+              <a:rPr lang="en-US" sz="1700" b="1" dirty="0">
                 <a:solidFill>
                   <a:srgbClr val="FFFFFF"/>
                 </a:solidFill>
               </a:rPr>
               <a:t>.</a:t>
             </a:r>
-            <a:endParaRPr lang="en-US" sz="2200" dirty="0"/>
-          </a:p>
-        </p:txBody>
-      </p:sp>
-      <p:sp>
-        <p:nvSpPr>
-          <p:cNvPr id="19" name="num_3"/>
+            <a:endParaRPr lang="en-US" sz="1700" dirty="0"/>
+          </a:p>
+        </p:txBody>
+      </p:sp>
+      <p:sp>
+        <p:nvSpPr>
+          <p:cNvPr id="25" name="card_3"/>
           <p:cNvSpPr/>
           <p:nvPr/>
         </p:nvSpPr>
         <p:spPr>
           <a:xfrm>
-            <a:off x="548640" y="4707331"/>
-            <a:ext cx="457200" cy="457200"/>
+            <a:off x="7313371" y="1965960"/>
+            <a:ext cx="2072030" cy="4206240"/>
+          </a:xfrm>
+          <a:prstGeom prst="roundRect">
+            <a:avLst>
+              <a:gd name="adj" fmla="val 6620"/>
+            </a:avLst>
+          </a:prstGeom>
+          <a:solidFill>
+            <a:srgbClr val="FFFFFF"/>
+          </a:solidFill>
+          <a:ln w="12700">
+            <a:solidFill>
+              <a:srgbClr val="D9D7F7"/>
+            </a:solidFill>
+            <a:prstDash val="solid"/>
+          </a:ln>
+          <a:effectLst>
+            <a:outerShdw blurRad="76200" dist="25400" dir="5400000" algn="bl" rotWithShape="0">
+              <a:srgbClr val="14142B">
+                <a:alpha val="12000"/>
+              </a:srgbClr>
+            </a:outerShdw>
+          </a:effectLst>
+        </p:spPr>
+      </p:sp>
+      <p:pic>
+        <p:nvPicPr>
+          <p:cNvPr id="26" name="item_img_3" descr="C:\Users\Chingu\AppData\Local\Temp\claude\C--Users-Chingu-Desktop-ACADEMIASEULWEB\d4111e1b-5523-44ea-97b2-b1a1d9545b9e\scratchpad\decks\cache\img_f2d76872a59da0cf.png"/>
+          <p:cNvPicPr>
+            <a:picLocks noChangeAspect="1"/>
+          </p:cNvPicPr>
+          <p:nvPr/>
+        </p:nvPicPr>
+        <p:blipFill>
+          <a:blip r:embed="rId6"/>
+          <a:stretch>
+            <a:fillRect/>
+          </a:stretch>
+        </p:blipFill>
+        <p:spPr>
+          <a:xfrm>
+            <a:off x="7434986" y="2057400"/>
+            <a:ext cx="1828800" cy="1828800"/>
+          </a:xfrm>
+          <a:prstGeom prst="rect">
+            <a:avLst/>
+          </a:prstGeom>
+        </p:spPr>
+      </p:pic>
+      <p:sp>
+        <p:nvSpPr>
+          <p:cNvPr id="27" name="num_3"/>
+          <p:cNvSpPr/>
+          <p:nvPr/>
+        </p:nvSpPr>
+        <p:spPr>
+          <a:xfrm>
+            <a:off x="7404811" y="2057400"/>
+            <a:ext cx="420624" cy="420624"/>
           </a:xfrm>
           <a:prstGeom prst="ellipse">
             <a:avLst/>
@@ -11594,9 +12138,9 @@
           <a:solidFill>
             <a:srgbClr val="003478"/>
           </a:solidFill>
-          <a:ln w="12700">
+          <a:ln w="19050">
             <a:solidFill>
-              <a:srgbClr val="003478"/>
+              <a:srgbClr val="FFFFFF"/>
             </a:solidFill>
             <a:prstDash val="solid"/>
           </a:ln>
@@ -11604,14 +12148,14 @@
       </p:sp>
       <p:sp>
         <p:nvSpPr>
-          <p:cNvPr id="20" name="Text 18"/>
+          <p:cNvPr id="28" name="Text 22"/>
           <p:cNvSpPr txBox="1"/>
           <p:nvPr/>
         </p:nvSpPr>
         <p:spPr>
           <a:xfrm>
-            <a:off x="548640" y="4707331"/>
-            <a:ext cx="457200" cy="457200"/>
+            <a:off x="7404811" y="2057400"/>
+            <a:ext cx="420624" cy="420624"/>
           </a:xfrm>
           <a:prstGeom prst="rect">
             <a:avLst/>
@@ -11629,27 +12173,27 @@
               <a:buNone/>
             </a:pPr>
             <a:r>
-              <a:rPr lang="en-US" sz="1600" b="1" dirty="0">
+              <a:rPr lang="en-US" sz="1500" b="1" dirty="0">
                 <a:solidFill>
                   <a:srgbClr val="FFFFFF"/>
                 </a:solidFill>
               </a:rPr>
               <a:t>9</a:t>
             </a:r>
-            <a:endParaRPr lang="en-US" sz="1600" dirty="0"/>
-          </a:p>
-        </p:txBody>
-      </p:sp>
-      <p:sp>
-        <p:nvSpPr>
-          <p:cNvPr id="21" name="Text 19"/>
+            <a:endParaRPr lang="en-US" sz="1500" dirty="0"/>
+          </a:p>
+        </p:txBody>
+      </p:sp>
+      <p:sp>
+        <p:nvSpPr>
+          <p:cNvPr id="29" name="Text 23"/>
           <p:cNvSpPr txBox="1"/>
           <p:nvPr/>
         </p:nvSpPr>
         <p:spPr>
           <a:xfrm>
-            <a:off x="1188720" y="4566514"/>
-            <a:ext cx="5285232" cy="738835"/>
+            <a:off x="7404811" y="3931920"/>
+            <a:ext cx="1889150" cy="1234440"/>
           </a:xfrm>
           <a:prstGeom prst="rect">
             <a:avLst/>
@@ -11663,11 +12207,11 @@
           </a:bodyPr>
           <a:lstStyle/>
           <a:p>
-            <a:pPr marL="0" indent="0" eaLnBrk="1">
+            <a:pPr marL="0" indent="0" algn="ctr" eaLnBrk="1">
               <a:buNone/>
             </a:pPr>
             <a:r>
-              <a:rPr lang="ko-KR" altLang="en-US" sz="2400" dirty="0">
+              <a:rPr lang="ko-KR" altLang="en-US" sz="2000" dirty="0">
                 <a:solidFill>
                   <a:srgbClr val="14142B"/>
                 </a:solidFill>
@@ -11678,31 +12222,31 @@
               <a:t>(reloj de pulsera) 휴대폰이에요</a:t>
             </a:r>
             <a:r>
-              <a:rPr lang="en-US" sz="2400" dirty="0">
+              <a:rPr lang="en-US" sz="2000" dirty="0">
                 <a:solidFill>
                   <a:srgbClr val="14142B"/>
                 </a:solidFill>
               </a:rPr>
               <a:t>?</a:t>
             </a:r>
-            <a:endParaRPr lang="en-US" sz="2400" dirty="0"/>
-          </a:p>
-        </p:txBody>
-      </p:sp>
-      <p:sp>
-        <p:nvSpPr>
-          <p:cNvPr id="22" name="rev_14_caja"/>
+            <a:endParaRPr lang="en-US" sz="2000" dirty="0"/>
+          </a:p>
+        </p:txBody>
+      </p:sp>
+      <p:sp>
+        <p:nvSpPr>
+          <p:cNvPr id="30" name="rev_14_caja"/>
           <p:cNvSpPr/>
           <p:nvPr/>
         </p:nvSpPr>
         <p:spPr>
           <a:xfrm>
-            <a:off x="6702552" y="4603090"/>
-            <a:ext cx="4937760" cy="665683"/>
+            <a:off x="7423099" y="5212080"/>
+            <a:ext cx="1852574" cy="868680"/>
           </a:xfrm>
           <a:prstGeom prst="roundRect">
             <a:avLst>
-              <a:gd name="adj" fmla="val 16484"/>
+              <a:gd name="adj" fmla="val 12632"/>
             </a:avLst>
           </a:prstGeom>
           <a:solidFill>
@@ -11718,14 +12262,14 @@
       </p:sp>
       <p:sp>
         <p:nvSpPr>
-          <p:cNvPr id="23" name="rev_14_txt"/>
+          <p:cNvPr id="31" name="rev_14_txt"/>
           <p:cNvSpPr txBox="1"/>
           <p:nvPr/>
         </p:nvSpPr>
         <p:spPr>
           <a:xfrm>
-            <a:off x="6793992" y="4603090"/>
-            <a:ext cx="4754880" cy="665683"/>
+            <a:off x="7450531" y="5212080"/>
+            <a:ext cx="1797710" cy="868680"/>
           </a:xfrm>
           <a:prstGeom prst="rect">
             <a:avLst/>
@@ -11743,7 +12287,7 @@
               <a:buNone/>
             </a:pPr>
             <a:r>
-              <a:rPr lang="ko-KR" altLang="en-US" sz="1800" b="1" dirty="0">
+              <a:rPr lang="ko-KR" altLang="en-US" sz="1700" b="1" dirty="0">
                 <a:solidFill>
                   <a:srgbClr val="FFFFFF"/>
                 </a:solidFill>
@@ -11754,7 +12298,7 @@
               <a:t>아니요</a:t>
             </a:r>
             <a:r>
-              <a:rPr lang="en-US" sz="1800" b="1" dirty="0">
+              <a:rPr lang="en-US" sz="1700" b="1" dirty="0">
                 <a:solidFill>
                   <a:srgbClr val="FFFFFF"/>
                 </a:solidFill>
@@ -11762,7 +12306,7 @@
               <a:t>, </a:t>
             </a:r>
             <a:r>
-              <a:rPr lang="ko-KR" altLang="en-US" sz="1800" b="1" dirty="0">
+              <a:rPr lang="ko-KR" altLang="en-US" sz="1700" b="1" dirty="0">
                 <a:solidFill>
                   <a:srgbClr val="FFFFFF"/>
                 </a:solidFill>
@@ -11773,7 +12317,7 @@
               <a:t>휴대폰이 아니에요</a:t>
             </a:r>
             <a:r>
-              <a:rPr lang="en-US" sz="1800" b="1" dirty="0">
+              <a:rPr lang="en-US" sz="1700" b="1" dirty="0">
                 <a:solidFill>
                   <a:srgbClr val="FFFFFF"/>
                 </a:solidFill>
@@ -11781,7 +12325,7 @@
               <a:t>. </a:t>
             </a:r>
             <a:r>
-              <a:rPr lang="ko-KR" altLang="en-US" sz="1800" b="1" dirty="0">
+              <a:rPr lang="ko-KR" altLang="en-US" sz="1700" b="1" dirty="0">
                 <a:solidFill>
                   <a:srgbClr val="FFFFFF"/>
                 </a:solidFill>
@@ -11792,27 +12336,85 @@
               <a:t>시계예요</a:t>
             </a:r>
             <a:r>
-              <a:rPr lang="en-US" sz="1800" b="1" dirty="0">
+              <a:rPr lang="en-US" sz="1700" b="1" dirty="0">
                 <a:solidFill>
                   <a:srgbClr val="FFFFFF"/>
                 </a:solidFill>
               </a:rPr>
               <a:t>.</a:t>
             </a:r>
-            <a:endParaRPr lang="en-US" sz="1800" dirty="0"/>
-          </a:p>
-        </p:txBody>
-      </p:sp>
-      <p:sp>
-        <p:nvSpPr>
-          <p:cNvPr id="24" name="num_4"/>
+            <a:endParaRPr lang="en-US" sz="1700" dirty="0"/>
+          </a:p>
+        </p:txBody>
+      </p:sp>
+      <p:sp>
+        <p:nvSpPr>
+          <p:cNvPr id="32" name="card_4"/>
           <p:cNvSpPr/>
           <p:nvPr/>
         </p:nvSpPr>
         <p:spPr>
           <a:xfrm>
-            <a:off x="548640" y="5574182"/>
-            <a:ext cx="457200" cy="457200"/>
+            <a:off x="9568282" y="1965960"/>
+            <a:ext cx="2072030" cy="4206240"/>
+          </a:xfrm>
+          <a:prstGeom prst="roundRect">
+            <a:avLst>
+              <a:gd name="adj" fmla="val 6620"/>
+            </a:avLst>
+          </a:prstGeom>
+          <a:solidFill>
+            <a:srgbClr val="FFFFFF"/>
+          </a:solidFill>
+          <a:ln w="12700">
+            <a:solidFill>
+              <a:srgbClr val="D9D7F7"/>
+            </a:solidFill>
+            <a:prstDash val="solid"/>
+          </a:ln>
+          <a:effectLst>
+            <a:outerShdw blurRad="76200" dist="25400" dir="5400000" algn="bl" rotWithShape="0">
+              <a:srgbClr val="14142B">
+                <a:alpha val="12000"/>
+              </a:srgbClr>
+            </a:outerShdw>
+          </a:effectLst>
+        </p:spPr>
+      </p:sp>
+      <p:pic>
+        <p:nvPicPr>
+          <p:cNvPr id="33" name="item_img_4" descr="C:\Users\Chingu\AppData\Local\Temp\claude\C--Users-Chingu-Desktop-ACADEMIASEULWEB\d4111e1b-5523-44ea-97b2-b1a1d9545b9e\scratchpad\decks\cache\img_132efa4451437470.png"/>
+          <p:cNvPicPr>
+            <a:picLocks noChangeAspect="1"/>
+          </p:cNvPicPr>
+          <p:nvPr/>
+        </p:nvPicPr>
+        <p:blipFill>
+          <a:blip r:embed="rId7"/>
+          <a:stretch>
+            <a:fillRect/>
+          </a:stretch>
+        </p:blipFill>
+        <p:spPr>
+          <a:xfrm>
+            <a:off x="9689897" y="2057400"/>
+            <a:ext cx="1828800" cy="1828800"/>
+          </a:xfrm>
+          <a:prstGeom prst="rect">
+            <a:avLst/>
+          </a:prstGeom>
+        </p:spPr>
+      </p:pic>
+      <p:sp>
+        <p:nvSpPr>
+          <p:cNvPr id="34" name="num_4"/>
+          <p:cNvSpPr/>
+          <p:nvPr/>
+        </p:nvSpPr>
+        <p:spPr>
+          <a:xfrm>
+            <a:off x="9659722" y="2057400"/>
+            <a:ext cx="420624" cy="420624"/>
           </a:xfrm>
           <a:prstGeom prst="ellipse">
             <a:avLst/>
@@ -11820,9 +12422,9 @@
           <a:solidFill>
             <a:srgbClr val="003478"/>
           </a:solidFill>
-          <a:ln w="12700">
+          <a:ln w="19050">
             <a:solidFill>
-              <a:srgbClr val="003478"/>
+              <a:srgbClr val="FFFFFF"/>
             </a:solidFill>
             <a:prstDash val="solid"/>
           </a:ln>
@@ -11830,14 +12432,14 @@
       </p:sp>
       <p:sp>
         <p:nvSpPr>
-          <p:cNvPr id="25" name="Text 23"/>
+          <p:cNvPr id="35" name="Text 28"/>
           <p:cNvSpPr txBox="1"/>
           <p:nvPr/>
         </p:nvSpPr>
         <p:spPr>
           <a:xfrm>
-            <a:off x="548640" y="5574182"/>
-            <a:ext cx="457200" cy="457200"/>
+            <a:off x="9659722" y="2057400"/>
+            <a:ext cx="420624" cy="420624"/>
           </a:xfrm>
           <a:prstGeom prst="rect">
             <a:avLst/>
@@ -11855,27 +12457,27 @@
               <a:buNone/>
             </a:pPr>
             <a:r>
-              <a:rPr lang="en-US" sz="1600" b="1" dirty="0">
+              <a:rPr lang="en-US" sz="1500" b="1" dirty="0">
                 <a:solidFill>
                   <a:srgbClr val="FFFFFF"/>
                 </a:solidFill>
               </a:rPr>
               <a:t>10</a:t>
             </a:r>
-            <a:endParaRPr lang="en-US" sz="1600" dirty="0"/>
-          </a:p>
-        </p:txBody>
-      </p:sp>
-      <p:sp>
-        <p:nvSpPr>
-          <p:cNvPr id="26" name="Text 24"/>
+            <a:endParaRPr lang="en-US" sz="1500" dirty="0"/>
+          </a:p>
+        </p:txBody>
+      </p:sp>
+      <p:sp>
+        <p:nvSpPr>
+          <p:cNvPr id="36" name="Text 29"/>
           <p:cNvSpPr txBox="1"/>
           <p:nvPr/>
         </p:nvSpPr>
         <p:spPr>
           <a:xfrm>
-            <a:off x="1188720" y="5433365"/>
-            <a:ext cx="5285232" cy="738835"/>
+            <a:off x="9659722" y="3931920"/>
+            <a:ext cx="1889150" cy="1234440"/>
           </a:xfrm>
           <a:prstGeom prst="rect">
             <a:avLst/>
@@ -11889,11 +12491,11 @@
           </a:bodyPr>
           <a:lstStyle/>
           <a:p>
-            <a:pPr marL="0" indent="0" eaLnBrk="1">
+            <a:pPr marL="0" indent="0" algn="ctr" eaLnBrk="1">
               <a:buNone/>
             </a:pPr>
             <a:r>
-              <a:rPr lang="ko-KR" altLang="en-US" sz="2400" dirty="0">
+              <a:rPr lang="ko-KR" altLang="en-US" sz="2000" dirty="0">
                 <a:solidFill>
                   <a:srgbClr val="14142B"/>
                 </a:solidFill>
@@ -11904,31 +12506,31 @@
               <a:t>(pepino) 오이예요</a:t>
             </a:r>
             <a:r>
-              <a:rPr lang="en-US" sz="2400" dirty="0">
+              <a:rPr lang="en-US" sz="2000" dirty="0">
                 <a:solidFill>
                   <a:srgbClr val="14142B"/>
                 </a:solidFill>
               </a:rPr>
               <a:t>?</a:t>
             </a:r>
-            <a:endParaRPr lang="en-US" sz="2400" dirty="0"/>
-          </a:p>
-        </p:txBody>
-      </p:sp>
-      <p:sp>
-        <p:nvSpPr>
-          <p:cNvPr id="27" name="rev_15_caja"/>
+            <a:endParaRPr lang="en-US" sz="2000" dirty="0"/>
+          </a:p>
+        </p:txBody>
+      </p:sp>
+      <p:sp>
+        <p:nvSpPr>
+          <p:cNvPr id="37" name="rev_15_caja"/>
           <p:cNvSpPr/>
           <p:nvPr/>
         </p:nvSpPr>
         <p:spPr>
           <a:xfrm>
-            <a:off x="6702552" y="5469941"/>
-            <a:ext cx="4937760" cy="665683"/>
+            <a:off x="9678010" y="5212080"/>
+            <a:ext cx="1852574" cy="868680"/>
           </a:xfrm>
           <a:prstGeom prst="roundRect">
             <a:avLst>
-              <a:gd name="adj" fmla="val 16484"/>
+              <a:gd name="adj" fmla="val 12632"/>
             </a:avLst>
           </a:prstGeom>
           <a:solidFill>
@@ -11944,14 +12546,14 @@
       </p:sp>
       <p:sp>
         <p:nvSpPr>
-          <p:cNvPr id="28" name="rev_15_txt"/>
+          <p:cNvPr id="38" name="rev_15_txt"/>
           <p:cNvSpPr txBox="1"/>
           <p:nvPr/>
         </p:nvSpPr>
         <p:spPr>
           <a:xfrm>
-            <a:off x="6793992" y="5469941"/>
-            <a:ext cx="4754880" cy="665683"/>
+            <a:off x="9705442" y="5212080"/>
+            <a:ext cx="1797710" cy="868680"/>
           </a:xfrm>
           <a:prstGeom prst="rect">
             <a:avLst/>
@@ -11969,7 +12571,7 @@
               <a:buNone/>
             </a:pPr>
             <a:r>
-              <a:rPr lang="ko-KR" altLang="en-US" sz="2200" b="1" dirty="0">
+              <a:rPr lang="ko-KR" altLang="en-US" sz="1700" b="1" dirty="0">
                 <a:solidFill>
                   <a:srgbClr val="FFFFFF"/>
                 </a:solidFill>
@@ -11980,7 +12582,7 @@
               <a:t>네</a:t>
             </a:r>
             <a:r>
-              <a:rPr lang="en-US" sz="2200" b="1" dirty="0">
+              <a:rPr lang="en-US" sz="1700" b="1" dirty="0">
                 <a:solidFill>
                   <a:srgbClr val="FFFFFF"/>
                 </a:solidFill>
@@ -11988,7 +12590,7 @@
               <a:t>, </a:t>
             </a:r>
             <a:r>
-              <a:rPr lang="ko-KR" altLang="en-US" sz="2200" b="1" dirty="0">
+              <a:rPr lang="ko-KR" altLang="en-US" sz="1700" b="1" dirty="0">
                 <a:solidFill>
                   <a:srgbClr val="FFFFFF"/>
                 </a:solidFill>
@@ -11999,20 +12601,20 @@
               <a:t>오이예요</a:t>
             </a:r>
             <a:r>
-              <a:rPr lang="en-US" sz="2200" b="1" dirty="0">
+              <a:rPr lang="en-US" sz="1700" b="1" dirty="0">
                 <a:solidFill>
                   <a:srgbClr val="FFFFFF"/>
                 </a:solidFill>
               </a:rPr>
               <a:t>.</a:t>
             </a:r>
-            <a:endParaRPr lang="en-US" sz="2200" dirty="0"/>
-          </a:p>
-        </p:txBody>
-      </p:sp>
-      <p:sp>
-        <p:nvSpPr>
-          <p:cNvPr id="29" name="Slide Number Placeholder 0"/>
+            <a:endParaRPr lang="en-US" sz="1700" dirty="0"/>
+          </a:p>
+        </p:txBody>
+      </p:sp>
+      <p:sp>
+        <p:nvSpPr>
+          <p:cNvPr id="39" name="Slide Number Placeholder 0"/>
           <p:cNvSpPr>
             <a:spLocks noGrp="1"/>
           </p:cNvSpPr>
@@ -12097,7 +12699,7 @@
                                           </p:stCondLst>
                                         </p:cTn>
                                         <p:tgtEl>
-                                          <p:spTgt spid="7"/>
+                                          <p:spTgt spid="9"/>
                                         </p:tgtEl>
                                         <p:attrNameLst>
                                           <p:attrName>style.visibility</p:attrName>
@@ -12124,7 +12726,7 @@
                                           </p:stCondLst>
                                         </p:cTn>
                                         <p:tgtEl>
-                                          <p:spTgt spid="8"/>
+                                          <p:spTgt spid="10"/>
                                         </p:tgtEl>
                                         <p:attrNameLst>
                                           <p:attrName>style.visibility</p:attrName>
@@ -12169,7 +12771,7 @@
                                           </p:stCondLst>
                                         </p:cTn>
                                         <p:tgtEl>
-                                          <p:spTgt spid="12"/>
+                                          <p:spTgt spid="16"/>
                                         </p:tgtEl>
                                         <p:attrNameLst>
                                           <p:attrName>style.visibility</p:attrName>
@@ -12196,7 +12798,7 @@
                                           </p:stCondLst>
                                         </p:cTn>
                                         <p:tgtEl>
-                                          <p:spTgt spid="13"/>
+                                          <p:spTgt spid="17"/>
                                         </p:tgtEl>
                                         <p:attrNameLst>
                                           <p:attrName>style.visibility</p:attrName>
@@ -12241,7 +12843,7 @@
                                           </p:stCondLst>
                                         </p:cTn>
                                         <p:tgtEl>
-                                          <p:spTgt spid="17"/>
+                                          <p:spTgt spid="23"/>
                                         </p:tgtEl>
                                         <p:attrNameLst>
                                           <p:attrName>style.visibility</p:attrName>
@@ -12268,7 +12870,7 @@
                                           </p:stCondLst>
                                         </p:cTn>
                                         <p:tgtEl>
-                                          <p:spTgt spid="18"/>
+                                          <p:spTgt spid="24"/>
                                         </p:tgtEl>
                                         <p:attrNameLst>
                                           <p:attrName>style.visibility</p:attrName>
@@ -12313,7 +12915,7 @@
                                           </p:stCondLst>
                                         </p:cTn>
                                         <p:tgtEl>
-                                          <p:spTgt spid="22"/>
+                                          <p:spTgt spid="30"/>
                                         </p:tgtEl>
                                         <p:attrNameLst>
                                           <p:attrName>style.visibility</p:attrName>
@@ -12340,7 +12942,7 @@
                                           </p:stCondLst>
                                         </p:cTn>
                                         <p:tgtEl>
-                                          <p:spTgt spid="23"/>
+                                          <p:spTgt spid="31"/>
                                         </p:tgtEl>
                                         <p:attrNameLst>
                                           <p:attrName>style.visibility</p:attrName>
@@ -12385,7 +12987,7 @@
                                           </p:stCondLst>
                                         </p:cTn>
                                         <p:tgtEl>
-                                          <p:spTgt spid="27"/>
+                                          <p:spTgt spid="37"/>
                                         </p:tgtEl>
                                         <p:attrNameLst>
                                           <p:attrName>style.visibility</p:attrName>
@@ -12412,7 +13014,7 @@
                                           </p:stCondLst>
                                         </p:cTn>
                                         <p:tgtEl>
-                                          <p:spTgt spid="28"/>
+                                          <p:spTgt spid="38"/>
                                         </p:tgtEl>
                                         <p:attrNameLst>
                                           <p:attrName>style.visibility</p:attrName>
@@ -12453,11 +13055,11 @@
       </p:par>
     </p:tnLst>
     <p:bldLst>
-      <p:bldP spid="8" grpId="0" animBg="1"/>
-      <p:bldP spid="13" grpId="0" animBg="1"/>
-      <p:bldP spid="18" grpId="0" animBg="1"/>
-      <p:bldP spid="23" grpId="0" animBg="1"/>
-      <p:bldP spid="28" grpId="0" animBg="1"/>
+      <p:bldP spid="10" grpId="0" animBg="1"/>
+      <p:bldP spid="17" grpId="0" animBg="1"/>
+      <p:bldP spid="24" grpId="0" animBg="1"/>
+      <p:bldP spid="31" grpId="0" animBg="1"/>
+      <p:bldP spid="38" grpId="0" animBg="1"/>
     </p:bldLst>
   </p:timing>
 </p:sld>
@@ -12941,7 +13543,7 @@
         <p:spPr>
           <a:xfrm>
             <a:off x="548640" y="1325880"/>
-            <a:ext cx="11064240" cy="548640"/>
+            <a:ext cx="11091672" cy="548640"/>
           </a:xfrm>
           <a:prstGeom prst="rect">
             <a:avLst/>
@@ -14307,7 +14909,7 @@
         <p:spPr>
           <a:xfrm>
             <a:off x="548640" y="1325880"/>
-            <a:ext cx="11064240" cy="548640"/>
+            <a:ext cx="11091672" cy="548640"/>
           </a:xfrm>
           <a:prstGeom prst="rect">
             <a:avLst/>
@@ -15654,7 +16256,7 @@
         <p:spPr>
           <a:xfrm>
             <a:off x="548640" y="1325880"/>
-            <a:ext cx="11064240" cy="457200"/>
+            <a:ext cx="11091672" cy="457200"/>
           </a:xfrm>
           <a:prstGeom prst="rect">
             <a:avLst/>
@@ -15692,7 +16294,7 @@
           <p:nvPr>
             <p:extLst>
               <p:ext uri="{D42A27DB-BD31-4B8C-83A1-F6EECF244321}">
-                <p14:modId xmlns:p14="http://schemas.microsoft.com/office/powerpoint/2010/main" val="69013972"/>
+                <p14:modId xmlns:p14="http://schemas.microsoft.com/office/powerpoint/2010/main" val="2117625437"/>
               </p:ext>
             </p:extLst>
           </p:nvPr>
@@ -17104,7 +17706,7 @@
         <p:spPr>
           <a:xfrm>
             <a:off x="548640" y="1325880"/>
-            <a:ext cx="11064240" cy="457200"/>
+            <a:ext cx="11091672" cy="457200"/>
           </a:xfrm>
           <a:prstGeom prst="rect">
             <a:avLst/>
@@ -17142,7 +17744,7 @@
           <p:nvPr>
             <p:extLst>
               <p:ext uri="{D42A27DB-BD31-4B8C-83A1-F6EECF244321}">
-                <p14:modId xmlns:p14="http://schemas.microsoft.com/office/powerpoint/2010/main" val="3973897694"/>
+                <p14:modId xmlns:p14="http://schemas.microsoft.com/office/powerpoint/2010/main" val="1502364788"/>
               </p:ext>
             </p:extLst>
           </p:nvPr>
@@ -18787,16 +19389,40 @@
           </a:p>
         </p:txBody>
       </p:sp>
-      <p:sp>
-        <p:nvSpPr>
-          <p:cNvPr id="3" name="Text 1"/>
+      <p:pic>
+        <p:nvPicPr>
+          <p:cNvPr id="3" name="imagen" descr="C:\Users\Chingu\AppData\Local\Temp\claude\C--Users-Chingu-Desktop-ACADEMIASEULWEB\d4111e1b-5523-44ea-97b2-b1a1d9545b9e\scratchpad\decks\cache\img_7e9e4d8057b1e5e7.png"/>
+          <p:cNvPicPr>
+            <a:picLocks noChangeAspect="1"/>
+          </p:cNvPicPr>
+          <p:nvPr/>
+        </p:nvPicPr>
+        <p:blipFill>
+          <a:blip r:embed="rId3"/>
+          <a:stretch>
+            <a:fillRect/>
+          </a:stretch>
+        </p:blipFill>
+        <p:spPr>
+          <a:xfrm>
+            <a:off x="8897112" y="2167666"/>
+            <a:ext cx="2743200" cy="3162748"/>
+          </a:xfrm>
+          <a:prstGeom prst="rect">
+            <a:avLst/>
+          </a:prstGeom>
+        </p:spPr>
+      </p:pic>
+      <p:sp>
+        <p:nvSpPr>
+          <p:cNvPr id="4" name="Text 1"/>
           <p:cNvSpPr txBox="1"/>
           <p:nvPr/>
         </p:nvSpPr>
         <p:spPr>
           <a:xfrm>
             <a:off x="548640" y="1325880"/>
-            <a:ext cx="11064240" cy="457200"/>
+            <a:ext cx="8074152" cy="457200"/>
           </a:xfrm>
           <a:prstGeom prst="rect">
             <a:avLst/>
@@ -18952,18 +19578,18 @@
       </p:sp>
       <p:sp>
         <p:nvSpPr>
-          <p:cNvPr id="4" name="col_0"/>
+          <p:cNvPr id="5" name="col_0"/>
           <p:cNvSpPr/>
           <p:nvPr/>
         </p:nvSpPr>
         <p:spPr>
           <a:xfrm>
             <a:off x="548640" y="1874520"/>
-            <a:ext cx="3483864" cy="4297680"/>
+            <a:ext cx="2478024" cy="4297680"/>
           </a:xfrm>
           <a:prstGeom prst="roundRect">
             <a:avLst>
-              <a:gd name="adj" fmla="val 3937"/>
+              <a:gd name="adj" fmla="val 5535"/>
             </a:avLst>
           </a:prstGeom>
           <a:solidFill>
@@ -18979,14 +19605,14 @@
       </p:sp>
       <p:sp>
         <p:nvSpPr>
-          <p:cNvPr id="5" name="Text 3"/>
+          <p:cNvPr id="6" name="Text 3"/>
           <p:cNvSpPr txBox="1"/>
           <p:nvPr/>
         </p:nvSpPr>
         <p:spPr>
           <a:xfrm>
             <a:off x="777240" y="2057400"/>
-            <a:ext cx="3026664" cy="548640"/>
+            <a:ext cx="2020824" cy="548640"/>
           </a:xfrm>
           <a:prstGeom prst="rect">
             <a:avLst/>
@@ -19017,14 +19643,14 @@
       </p:sp>
       <p:sp>
         <p:nvSpPr>
-          <p:cNvPr id="6" name="Text 4"/>
+          <p:cNvPr id="7" name="Text 4"/>
           <p:cNvSpPr txBox="1"/>
           <p:nvPr/>
         </p:nvSpPr>
         <p:spPr>
           <a:xfrm>
             <a:off x="777240" y="2651760"/>
-            <a:ext cx="3026664" cy="914400"/>
+            <a:ext cx="2020824" cy="914400"/>
           </a:xfrm>
           <a:prstGeom prst="rect">
             <a:avLst/>
@@ -19042,7 +19668,7 @@
               <a:buNone/>
             </a:pPr>
             <a:r>
-              <a:rPr lang="ko-KR" altLang="en-US" sz="2800" b="1" dirty="0">
+              <a:rPr lang="ko-KR" altLang="en-US" sz="2700" b="1" dirty="0">
                 <a:solidFill>
                   <a:srgbClr val="4236F6"/>
                 </a:solidFill>
@@ -19053,21 +19679,21 @@
               <a:t>커피 </a:t>
             </a:r>
             <a:r>
-              <a:rPr lang="en-US" sz="2800" b="1" dirty="0">
+              <a:rPr lang="en-US" sz="2700" b="1" dirty="0">
                 <a:solidFill>
                   <a:srgbClr val="4236F6"/>
                 </a:solidFill>
               </a:rPr>
               <a:t>·</a:t>
             </a:r>
-            <a:endParaRPr lang="en-US" sz="2800" dirty="0"/>
+            <a:endParaRPr lang="en-US" sz="2700" dirty="0"/>
           </a:p>
           <a:p>
             <a:pPr marL="0" indent="0" eaLnBrk="1">
               <a:buNone/>
             </a:pPr>
             <a:r>
-              <a:rPr lang="ko-KR" altLang="en-US" sz="2800" b="1" dirty="0">
+              <a:rPr lang="ko-KR" altLang="en-US" sz="2700" b="1" dirty="0">
                 <a:solidFill>
                   <a:srgbClr val="4236F6"/>
                 </a:solidFill>
@@ -19078,7 +19704,7 @@
               <a:t>휴대폰 </a:t>
             </a:r>
             <a:r>
-              <a:rPr lang="en-US" sz="2800" b="1" dirty="0">
+              <a:rPr lang="en-US" sz="2700" b="1" dirty="0">
                 <a:solidFill>
                   <a:srgbClr val="4236F6"/>
                 </a:solidFill>
@@ -19086,7 +19712,7 @@
               <a:t>· </a:t>
             </a:r>
             <a:r>
-              <a:rPr lang="ko-KR" altLang="en-US" sz="2800" b="1" dirty="0">
+              <a:rPr lang="ko-KR" altLang="en-US" sz="2700" b="1" dirty="0">
                 <a:solidFill>
                   <a:srgbClr val="4236F6"/>
                 </a:solidFill>
@@ -19096,20 +19722,20 @@
               </a:rPr>
               <a:t>책</a:t>
             </a:r>
-            <a:endParaRPr lang="en-US" sz="2800" dirty="0"/>
-          </a:p>
-        </p:txBody>
-      </p:sp>
-      <p:sp>
-        <p:nvSpPr>
-          <p:cNvPr id="7" name="lista"/>
+            <a:endParaRPr lang="en-US" sz="2700" dirty="0"/>
+          </a:p>
+        </p:txBody>
+      </p:sp>
+      <p:sp>
+        <p:nvSpPr>
+          <p:cNvPr id="8" name="lista"/>
           <p:cNvSpPr txBox="1"/>
           <p:nvPr/>
         </p:nvSpPr>
         <p:spPr>
           <a:xfrm>
             <a:off x="731520" y="3657600"/>
-            <a:ext cx="3118104" cy="2377440"/>
+            <a:ext cx="2112264" cy="2377440"/>
           </a:xfrm>
           <a:prstGeom prst="rect">
             <a:avLst/>
@@ -19180,18 +19806,18 @@
       </p:sp>
       <p:sp>
         <p:nvSpPr>
-          <p:cNvPr id="8" name="col_1"/>
+          <p:cNvPr id="9" name="col_1"/>
           <p:cNvSpPr/>
           <p:nvPr/>
         </p:nvSpPr>
         <p:spPr>
           <a:xfrm>
-            <a:off x="4352544" y="1874520"/>
-            <a:ext cx="3483864" cy="4297680"/>
+            <a:off x="3346704" y="1874520"/>
+            <a:ext cx="2478024" cy="4297680"/>
           </a:xfrm>
           <a:prstGeom prst="roundRect">
             <a:avLst>
-              <a:gd name="adj" fmla="val 3937"/>
+              <a:gd name="adj" fmla="val 5535"/>
             </a:avLst>
           </a:prstGeom>
           <a:solidFill>
@@ -19207,14 +19833,14 @@
       </p:sp>
       <p:sp>
         <p:nvSpPr>
-          <p:cNvPr id="9" name="Text 7"/>
+          <p:cNvPr id="10" name="Text 7"/>
           <p:cNvSpPr txBox="1"/>
           <p:nvPr/>
         </p:nvSpPr>
         <p:spPr>
           <a:xfrm>
-            <a:off x="4581144" y="2057400"/>
-            <a:ext cx="3026664" cy="548640"/>
+            <a:off x="3575304" y="2057400"/>
+            <a:ext cx="2020824" cy="548640"/>
           </a:xfrm>
           <a:prstGeom prst="rect">
             <a:avLst/>
@@ -19245,14 +19871,14 @@
       </p:sp>
       <p:sp>
         <p:nvSpPr>
-          <p:cNvPr id="10" name="Text 8"/>
+          <p:cNvPr id="11" name="Text 8"/>
           <p:cNvSpPr txBox="1"/>
           <p:nvPr/>
         </p:nvSpPr>
         <p:spPr>
           <a:xfrm>
-            <a:off x="4581144" y="2651760"/>
-            <a:ext cx="3026664" cy="914400"/>
+            <a:off x="3575304" y="2651760"/>
+            <a:ext cx="2020824" cy="914400"/>
           </a:xfrm>
           <a:prstGeom prst="rect">
             <a:avLst/>
@@ -19270,7 +19896,7 @@
               <a:buNone/>
             </a:pPr>
             <a:r>
-              <a:rPr lang="ko-KR" altLang="en-US" sz="2800" b="1" dirty="0">
+              <a:rPr lang="ko-KR" altLang="en-US" sz="2700" b="1" dirty="0">
                 <a:solidFill>
                   <a:srgbClr val="4236F6"/>
                 </a:solidFill>
@@ -19281,21 +19907,21 @@
               <a:t>가방 </a:t>
             </a:r>
             <a:r>
-              <a:rPr lang="en-US" sz="2800" b="1" dirty="0">
+              <a:rPr lang="en-US" sz="2700" b="1" dirty="0">
                 <a:solidFill>
                   <a:srgbClr val="4236F6"/>
                 </a:solidFill>
               </a:rPr>
               <a:t>·</a:t>
             </a:r>
-            <a:endParaRPr lang="en-US" sz="2800" dirty="0"/>
+            <a:endParaRPr lang="en-US" sz="2700" dirty="0"/>
           </a:p>
           <a:p>
             <a:pPr marL="0" indent="0" eaLnBrk="1">
               <a:buNone/>
             </a:pPr>
             <a:r>
-              <a:rPr lang="ko-KR" altLang="en-US" sz="2800" b="1" dirty="0">
+              <a:rPr lang="ko-KR" altLang="en-US" sz="2700" b="1" dirty="0">
                 <a:solidFill>
                   <a:srgbClr val="4236F6"/>
                 </a:solidFill>
@@ -19306,7 +19932,7 @@
               <a:t>우산 </a:t>
             </a:r>
             <a:r>
-              <a:rPr lang="en-US" sz="2800" b="1" dirty="0">
+              <a:rPr lang="en-US" sz="2700" b="1" dirty="0">
                 <a:solidFill>
                   <a:srgbClr val="4236F6"/>
                 </a:solidFill>
@@ -19314,7 +19940,7 @@
               <a:t>· </a:t>
             </a:r>
             <a:r>
-              <a:rPr lang="ko-KR" altLang="en-US" sz="2800" b="1" dirty="0">
+              <a:rPr lang="ko-KR" altLang="en-US" sz="2700" b="1" dirty="0">
                 <a:solidFill>
                   <a:srgbClr val="4236F6"/>
                 </a:solidFill>
@@ -19324,20 +19950,20 @@
               </a:rPr>
               <a:t>공책</a:t>
             </a:r>
-            <a:endParaRPr lang="en-US" sz="2800" dirty="0"/>
-          </a:p>
-        </p:txBody>
-      </p:sp>
-      <p:sp>
-        <p:nvSpPr>
-          <p:cNvPr id="11" name="lista"/>
+            <a:endParaRPr lang="en-US" sz="2700" dirty="0"/>
+          </a:p>
+        </p:txBody>
+      </p:sp>
+      <p:sp>
+        <p:nvSpPr>
+          <p:cNvPr id="12" name="lista"/>
           <p:cNvSpPr txBox="1"/>
           <p:nvPr/>
         </p:nvSpPr>
         <p:spPr>
           <a:xfrm>
-            <a:off x="4535424" y="3657600"/>
-            <a:ext cx="3118104" cy="2377440"/>
+            <a:off x="3529584" y="3657600"/>
+            <a:ext cx="2112264" cy="2377440"/>
           </a:xfrm>
           <a:prstGeom prst="rect">
             <a:avLst/>
@@ -19408,18 +20034,18 @@
       </p:sp>
       <p:sp>
         <p:nvSpPr>
-          <p:cNvPr id="12" name="col_2"/>
+          <p:cNvPr id="13" name="col_2"/>
           <p:cNvSpPr/>
           <p:nvPr/>
         </p:nvSpPr>
         <p:spPr>
           <a:xfrm>
-            <a:off x="8156448" y="1874520"/>
-            <a:ext cx="3483864" cy="4297680"/>
+            <a:off x="6144768" y="1874520"/>
+            <a:ext cx="2478024" cy="4297680"/>
           </a:xfrm>
           <a:prstGeom prst="roundRect">
             <a:avLst>
-              <a:gd name="adj" fmla="val 3937"/>
+              <a:gd name="adj" fmla="val 5535"/>
             </a:avLst>
           </a:prstGeom>
           <a:solidFill>
@@ -19435,14 +20061,14 @@
       </p:sp>
       <p:sp>
         <p:nvSpPr>
-          <p:cNvPr id="13" name="Text 11"/>
+          <p:cNvPr id="14" name="Text 11"/>
           <p:cNvSpPr txBox="1"/>
           <p:nvPr/>
         </p:nvSpPr>
         <p:spPr>
           <a:xfrm>
-            <a:off x="8385048" y="2057400"/>
-            <a:ext cx="3026664" cy="548640"/>
+            <a:off x="6373368" y="2057400"/>
+            <a:ext cx="2020824" cy="548640"/>
           </a:xfrm>
           <a:prstGeom prst="rect">
             <a:avLst/>
@@ -19473,14 +20099,14 @@
       </p:sp>
       <p:sp>
         <p:nvSpPr>
-          <p:cNvPr id="14" name="Text 12"/>
+          <p:cNvPr id="15" name="Text 12"/>
           <p:cNvSpPr txBox="1"/>
           <p:nvPr/>
         </p:nvSpPr>
         <p:spPr>
           <a:xfrm>
-            <a:off x="8385048" y="2651760"/>
-            <a:ext cx="3026664" cy="914400"/>
+            <a:off x="6373368" y="2651760"/>
+            <a:ext cx="2020824" cy="914400"/>
           </a:xfrm>
           <a:prstGeom prst="rect">
             <a:avLst/>
@@ -19498,7 +20124,7 @@
               <a:buNone/>
             </a:pPr>
             <a:r>
-              <a:rPr lang="ko-KR" altLang="en-US" sz="3400" b="1" dirty="0">
+              <a:rPr lang="ko-KR" altLang="en-US" sz="2800" b="1" dirty="0">
                 <a:solidFill>
                   <a:srgbClr val="4236F6"/>
                 </a:solidFill>
@@ -19509,15 +20135,21 @@
               <a:t>시계 </a:t>
             </a:r>
             <a:r>
-              <a:rPr lang="en-US" sz="3400" b="1" dirty="0">
+              <a:rPr lang="en-US" sz="2800" b="1" dirty="0">
                 <a:solidFill>
                   <a:srgbClr val="4236F6"/>
                 </a:solidFill>
               </a:rPr>
-              <a:t>· </a:t>
-            </a:r>
-            <a:r>
-              <a:rPr lang="ko-KR" altLang="en-US" sz="3400" b="1" dirty="0">
+              <a:t>·</a:t>
+            </a:r>
+            <a:endParaRPr lang="en-US" sz="2800" dirty="0"/>
+          </a:p>
+          <a:p>
+            <a:pPr marL="0" indent="0" eaLnBrk="1">
+              <a:buNone/>
+            </a:pPr>
+            <a:r>
+              <a:rPr lang="ko-KR" altLang="en-US" sz="2800" b="1" dirty="0">
                 <a:solidFill>
                   <a:srgbClr val="4236F6"/>
                 </a:solidFill>
@@ -19527,20 +20159,20 @@
               </a:rPr>
               <a:t>붕어빵</a:t>
             </a:r>
-            <a:endParaRPr lang="en-US" sz="3400" dirty="0"/>
-          </a:p>
-        </p:txBody>
-      </p:sp>
-      <p:sp>
-        <p:nvSpPr>
-          <p:cNvPr id="15" name="lista"/>
+            <a:endParaRPr lang="en-US" sz="2800" dirty="0"/>
+          </a:p>
+        </p:txBody>
+      </p:sp>
+      <p:sp>
+        <p:nvSpPr>
+          <p:cNvPr id="16" name="lista"/>
           <p:cNvSpPr txBox="1"/>
           <p:nvPr/>
         </p:nvSpPr>
         <p:spPr>
           <a:xfrm>
-            <a:off x="8339328" y="3657600"/>
-            <a:ext cx="3118104" cy="2377440"/>
+            <a:off x="6327648" y="3657600"/>
+            <a:ext cx="2112264" cy="2377440"/>
           </a:xfrm>
           <a:prstGeom prst="rect">
             <a:avLst/>
@@ -20547,7 +21179,7 @@
               <a:buChar char="•"/>
             </a:pPr>
             <a:r>
-              <a:rPr lang="ko-KR" altLang="en-US" sz="2400" dirty="0">
+              <a:rPr lang="ko-KR" altLang="en-US" sz="2800" dirty="0">
                 <a:solidFill>
                   <a:srgbClr val="14142B"/>
                 </a:solidFill>
@@ -20558,14 +21190,14 @@
               <a:t>이게 뭐예요</a:t>
             </a:r>
             <a:r>
-              <a:rPr lang="en-US" sz="2400" dirty="0">
+              <a:rPr lang="en-US" sz="2800" dirty="0">
                 <a:solidFill>
                   <a:srgbClr val="14142B"/>
                 </a:solidFill>
               </a:rPr>
               <a:t>?</a:t>
             </a:r>
-            <a:endParaRPr lang="en-US" sz="2400" dirty="0"/>
+            <a:endParaRPr lang="en-US" sz="2800" dirty="0"/>
           </a:p>
           <a:p>
             <a:pPr marL="228600" indent="-228600" eaLnBrk="1">
@@ -20576,7 +21208,7 @@
               <a:buChar char="•"/>
             </a:pPr>
             <a:r>
-              <a:rPr lang="ko-KR" altLang="en-US" sz="2400" dirty="0">
+              <a:rPr lang="ko-KR" altLang="en-US" sz="2800" dirty="0">
                 <a:solidFill>
                   <a:srgbClr val="14142B"/>
                 </a:solidFill>
@@ -20587,14 +21219,14 @@
               <a:t>책이에요</a:t>
             </a:r>
             <a:r>
-              <a:rPr lang="en-US" sz="2400" dirty="0">
+              <a:rPr lang="en-US" sz="2800" dirty="0">
                 <a:solidFill>
                   <a:srgbClr val="14142B"/>
                 </a:solidFill>
               </a:rPr>
               <a:t>.</a:t>
             </a:r>
-            <a:endParaRPr lang="en-US" sz="2400" dirty="0"/>
+            <a:endParaRPr lang="en-US" sz="2800" dirty="0"/>
           </a:p>
           <a:p>
             <a:pPr marL="228600" indent="-228600" eaLnBrk="1">
@@ -20605,7 +21237,7 @@
               <a:buChar char="•"/>
             </a:pPr>
             <a:r>
-              <a:rPr lang="ko-KR" altLang="en-US" sz="2400" dirty="0">
+              <a:rPr lang="ko-KR" altLang="en-US" sz="2800" dirty="0">
                 <a:solidFill>
                   <a:srgbClr val="14142B"/>
                 </a:solidFill>
@@ -20616,7 +21248,7 @@
               <a:t>아니요</a:t>
             </a:r>
             <a:r>
-              <a:rPr lang="en-US" sz="2400" dirty="0">
+              <a:rPr lang="en-US" sz="2800" dirty="0">
                 <a:solidFill>
                   <a:srgbClr val="14142B"/>
                 </a:solidFill>
@@ -20624,7 +21256,7 @@
               <a:t>, </a:t>
             </a:r>
             <a:r>
-              <a:rPr lang="ko-KR" altLang="en-US" sz="2400" dirty="0">
+              <a:rPr lang="ko-KR" altLang="en-US" sz="2800" dirty="0">
                 <a:solidFill>
                   <a:srgbClr val="14142B"/>
                 </a:solidFill>
@@ -20635,14 +21267,14 @@
               <a:t>빵이 아니에요</a:t>
             </a:r>
             <a:r>
-              <a:rPr lang="en-US" sz="2400" dirty="0">
+              <a:rPr lang="en-US" sz="2800" dirty="0">
                 <a:solidFill>
                   <a:srgbClr val="14142B"/>
                 </a:solidFill>
               </a:rPr>
               <a:t>.</a:t>
             </a:r>
-            <a:endParaRPr lang="en-US" sz="2400" dirty="0"/>
+            <a:endParaRPr lang="en-US" sz="2800" dirty="0"/>
           </a:p>
         </p:txBody>
       </p:sp>
@@ -21154,7 +21786,7 @@
         <p:spPr>
           <a:xfrm>
             <a:off x="548640" y="1325880"/>
-            <a:ext cx="11064240" cy="548640"/>
+            <a:ext cx="11091672" cy="548640"/>
           </a:xfrm>
           <a:prstGeom prst="rect">
             <a:avLst/>
@@ -22025,14 +22657,14 @@
               <a:buNone/>
             </a:pPr>
             <a:r>
-              <a:rPr lang="en-US" sz="2400" dirty="0">
+              <a:rPr lang="en-US" sz="2300" dirty="0">
                 <a:solidFill>
                   <a:srgbClr val="14142B"/>
                 </a:solidFill>
               </a:rPr>
               <a:t>La mamá de tu amigo se queda en la puerta.</a:t>
             </a:r>
-            <a:endParaRPr lang="en-US" sz="2400" dirty="0"/>
+            <a:endParaRPr lang="en-US" sz="2300" dirty="0"/>
           </a:p>
         </p:txBody>
       </p:sp>
@@ -22758,7 +23390,7 @@
           <p:nvPr>
             <p:extLst>
               <p:ext uri="{D42A27DB-BD31-4B8C-83A1-F6EECF244321}">
-                <p14:modId xmlns:p14="http://schemas.microsoft.com/office/powerpoint/2010/main" val="895949430"/>
+                <p14:modId xmlns:p14="http://schemas.microsoft.com/office/powerpoint/2010/main" val="63512680"/>
               </p:ext>
             </p:extLst>
           </p:nvPr>
@@ -23942,16 +24574,40 @@
           </a:p>
         </p:txBody>
       </p:sp>
-      <p:sp>
-        <p:nvSpPr>
-          <p:cNvPr id="3" name="panel"/>
+      <p:pic>
+        <p:nvPicPr>
+          <p:cNvPr id="3" name="imagen" descr="C:\Users\Chingu\AppData\Local\Temp\claude\C--Users-Chingu-Desktop-ACADEMIASEULWEB\d4111e1b-5523-44ea-97b2-b1a1d9545b9e\scratchpad\decks\cache\img_26e0c2056a9b68a9.png"/>
+          <p:cNvPicPr>
+            <a:picLocks noChangeAspect="1"/>
+          </p:cNvPicPr>
+          <p:nvPr/>
+        </p:nvPicPr>
+        <p:blipFill>
+          <a:blip r:embed="rId5"/>
+          <a:stretch>
+            <a:fillRect/>
+          </a:stretch>
+        </p:blipFill>
+        <p:spPr>
+          <a:xfrm>
+            <a:off x="7754112" y="1508760"/>
+            <a:ext cx="3886200" cy="4480560"/>
+          </a:xfrm>
+          <a:prstGeom prst="rect">
+            <a:avLst/>
+          </a:prstGeom>
+        </p:spPr>
+      </p:pic>
+      <p:sp>
+        <p:nvSpPr>
+          <p:cNvPr id="4" name="panel"/>
           <p:cNvSpPr/>
           <p:nvPr/>
         </p:nvSpPr>
         <p:spPr>
           <a:xfrm>
-            <a:off x="1280160" y="1645920"/>
-            <a:ext cx="9628632" cy="3108960"/>
+            <a:off x="548640" y="1645920"/>
+            <a:ext cx="6931152" cy="3108960"/>
           </a:xfrm>
           <a:prstGeom prst="roundRect">
             <a:avLst>
@@ -23971,14 +24627,14 @@
       </p:sp>
       <p:sp>
         <p:nvSpPr>
-          <p:cNvPr id="4" name="frase_ko"/>
+          <p:cNvPr id="5" name="frase_ko"/>
           <p:cNvSpPr txBox="1"/>
           <p:nvPr/>
         </p:nvSpPr>
         <p:spPr>
           <a:xfrm>
-            <a:off x="1463040" y="1828800"/>
-            <a:ext cx="9262872" cy="1828800"/>
+            <a:off x="731520" y="1783080"/>
+            <a:ext cx="6565392" cy="2834640"/>
           </a:xfrm>
           <a:prstGeom prst="rect">
             <a:avLst/>
@@ -24015,34 +24671,6 @@
               <a:t>?</a:t>
             </a:r>
             <a:endParaRPr lang="en-US" sz="6400" dirty="0"/>
-          </a:p>
-        </p:txBody>
-      </p:sp>
-      <p:sp>
-        <p:nvSpPr>
-          <p:cNvPr id="5" name="Text 3"/>
-          <p:cNvSpPr txBox="1"/>
-          <p:nvPr/>
-        </p:nvSpPr>
-        <p:spPr>
-          <a:xfrm>
-            <a:off x="1463040" y="3657600"/>
-            <a:ext cx="9262872" cy="822960"/>
-          </a:xfrm>
-          <a:prstGeom prst="rect">
-            <a:avLst/>
-          </a:prstGeom>
-          <a:noFill/>
-          <a:ln/>
-        </p:spPr>
-        <p:txBody>
-          <a:bodyPr wrap="square" lIns="0" tIns="0" rIns="0" bIns="0" rtlCol="0" anchor="t"/>
-          <a:lstStyle/>
-          <a:p>
-            <a:pPr marL="0" indent="0" algn="ctr" eaLnBrk="0">
-              <a:buNone/>
-            </a:pPr>
-            <a:endParaRPr lang="en-US" sz="2400" dirty="0"/>
           </a:p>
         </p:txBody>
       </p:sp>
@@ -24064,14 +24692,14 @@
           </p:nvPr>
         </p:nvPicPr>
         <p:blipFill>
-          <a:blip r:embed="rId5"/>
+          <a:blip r:embed="rId6"/>
           <a:stretch>
             <a:fillRect/>
           </a:stretch>
         </p:blipFill>
         <p:spPr>
           <a:xfrm>
-            <a:off x="10332720" y="4160520"/>
+            <a:off x="6903720" y="4160520"/>
             <a:ext cx="384048" cy="384048"/>
           </a:xfrm>
           <a:prstGeom prst="rect">
@@ -24209,7 +24837,7 @@
         <p:spPr>
           <a:xfrm>
             <a:off x="548640" y="1325880"/>
-            <a:ext cx="11064240" cy="457200"/>
+            <a:ext cx="11091672" cy="457200"/>
           </a:xfrm>
           <a:prstGeom prst="rect">
             <a:avLst/>
@@ -24288,8 +24916,8 @@
         </p:blipFill>
         <p:spPr>
           <a:xfrm>
-            <a:off x="1893799" y="1984248"/>
-            <a:ext cx="854507" cy="854507"/>
+            <a:off x="1832762" y="1984248"/>
+            <a:ext cx="976579" cy="976579"/>
           </a:xfrm>
           <a:prstGeom prst="rect">
             <a:avLst/>
@@ -24304,8 +24932,8 @@
         </p:nvSpPr>
         <p:spPr>
           <a:xfrm>
-            <a:off x="548640" y="2857043"/>
-            <a:ext cx="3544824" cy="447599"/>
+            <a:off x="548640" y="2979115"/>
+            <a:ext cx="3544824" cy="406908"/>
           </a:xfrm>
           <a:prstGeom prst="rect">
             <a:avLst/>
@@ -24323,7 +24951,7 @@
               <a:buNone/>
             </a:pPr>
             <a:r>
-              <a:rPr lang="ko-KR" altLang="en-US" sz="2800" b="1" dirty="0">
+              <a:rPr lang="ko-KR" altLang="en-US" sz="2500" b="1" dirty="0">
                 <a:solidFill>
                   <a:srgbClr val="4236F6"/>
                 </a:solidFill>
@@ -24333,7 +24961,7 @@
               </a:rPr>
               <a:t>책</a:t>
             </a:r>
-            <a:endParaRPr lang="en-US" sz="2800" dirty="0"/>
+            <a:endParaRPr lang="en-US" sz="2500" dirty="0"/>
           </a:p>
         </p:txBody>
       </p:sp>
@@ -24345,8 +24973,8 @@
         </p:nvSpPr>
         <p:spPr>
           <a:xfrm>
-            <a:off x="621792" y="3304642"/>
-            <a:ext cx="3398520" cy="274320"/>
+            <a:off x="621792" y="3386023"/>
+            <a:ext cx="3398520" cy="449885"/>
           </a:xfrm>
           <a:prstGeom prst="rect">
             <a:avLst/>
@@ -24400,8 +25028,8 @@
         </p:blipFill>
         <p:spPr>
           <a:xfrm>
-            <a:off x="3654552" y="3488436"/>
-            <a:ext cx="329184" cy="329184"/>
+            <a:off x="3691128" y="1947672"/>
+            <a:ext cx="310896" cy="310896"/>
           </a:xfrm>
           <a:prstGeom prst="rect">
             <a:avLst/>
@@ -24458,8 +25086,8 @@
         </p:blipFill>
         <p:spPr>
           <a:xfrm>
-            <a:off x="5667223" y="1984248"/>
-            <a:ext cx="854507" cy="854507"/>
+            <a:off x="5606186" y="1984248"/>
+            <a:ext cx="976579" cy="976579"/>
           </a:xfrm>
           <a:prstGeom prst="rect">
             <a:avLst/>
@@ -24474,8 +25102,8 @@
         </p:nvSpPr>
         <p:spPr>
           <a:xfrm>
-            <a:off x="4322064" y="2857043"/>
-            <a:ext cx="3544824" cy="447599"/>
+            <a:off x="4322064" y="2979115"/>
+            <a:ext cx="3544824" cy="406908"/>
           </a:xfrm>
           <a:prstGeom prst="rect">
             <a:avLst/>
@@ -24493,7 +25121,7 @@
               <a:buNone/>
             </a:pPr>
             <a:r>
-              <a:rPr lang="ko-KR" altLang="en-US" sz="2800" b="1" dirty="0">
+              <a:rPr lang="ko-KR" altLang="en-US" sz="2500" b="1" dirty="0">
                 <a:solidFill>
                   <a:srgbClr val="4236F6"/>
                 </a:solidFill>
@@ -24503,7 +25131,7 @@
               </a:rPr>
               <a:t>연필</a:t>
             </a:r>
-            <a:endParaRPr lang="en-US" sz="2800" dirty="0"/>
+            <a:endParaRPr lang="en-US" sz="2500" dirty="0"/>
           </a:p>
         </p:txBody>
       </p:sp>
@@ -24515,8 +25143,8 @@
         </p:nvSpPr>
         <p:spPr>
           <a:xfrm>
-            <a:off x="4395216" y="3304642"/>
-            <a:ext cx="3398520" cy="274320"/>
+            <a:off x="4395216" y="3386023"/>
+            <a:ext cx="3398520" cy="449885"/>
           </a:xfrm>
           <a:prstGeom prst="rect">
             <a:avLst/>
@@ -24570,8 +25198,8 @@
         </p:blipFill>
         <p:spPr>
           <a:xfrm>
-            <a:off x="7427976" y="3488436"/>
-            <a:ext cx="329184" cy="329184"/>
+            <a:off x="7464552" y="1947672"/>
+            <a:ext cx="310896" cy="310896"/>
           </a:xfrm>
           <a:prstGeom prst="rect">
             <a:avLst/>
@@ -24628,8 +25256,8 @@
         </p:blipFill>
         <p:spPr>
           <a:xfrm>
-            <a:off x="9440647" y="1984248"/>
-            <a:ext cx="854507" cy="854507"/>
+            <a:off x="9379610" y="1984248"/>
+            <a:ext cx="976579" cy="976579"/>
           </a:xfrm>
           <a:prstGeom prst="rect">
             <a:avLst/>
@@ -24644,8 +25272,8 @@
         </p:nvSpPr>
         <p:spPr>
           <a:xfrm>
-            <a:off x="8095488" y="2857043"/>
-            <a:ext cx="3544824" cy="447599"/>
+            <a:off x="8095488" y="2979115"/>
+            <a:ext cx="3544824" cy="406908"/>
           </a:xfrm>
           <a:prstGeom prst="rect">
             <a:avLst/>
@@ -24663,7 +25291,7 @@
               <a:buNone/>
             </a:pPr>
             <a:r>
-              <a:rPr lang="ko-KR" altLang="en-US" sz="2800" b="1" dirty="0">
+              <a:rPr lang="ko-KR" altLang="en-US" sz="2500" b="1" dirty="0">
                 <a:solidFill>
                   <a:srgbClr val="4236F6"/>
                 </a:solidFill>
@@ -24673,7 +25301,7 @@
               </a:rPr>
               <a:t>공책</a:t>
             </a:r>
-            <a:endParaRPr lang="en-US" sz="2800" dirty="0"/>
+            <a:endParaRPr lang="en-US" sz="2500" dirty="0"/>
           </a:p>
         </p:txBody>
       </p:sp>
@@ -24685,8 +25313,8 @@
         </p:nvSpPr>
         <p:spPr>
           <a:xfrm>
-            <a:off x="8168640" y="3304642"/>
-            <a:ext cx="3398520" cy="274320"/>
+            <a:off x="8168640" y="3386023"/>
+            <a:ext cx="3398520" cy="449885"/>
           </a:xfrm>
           <a:prstGeom prst="rect">
             <a:avLst/>
@@ -24740,8 +25368,8 @@
         </p:blipFill>
         <p:spPr>
           <a:xfrm>
-            <a:off x="11201400" y="3488436"/>
-            <a:ext cx="329184" cy="329184"/>
+            <a:off x="11237976" y="1947672"/>
+            <a:ext cx="310896" cy="310896"/>
           </a:xfrm>
           <a:prstGeom prst="rect">
             <a:avLst/>
@@ -24798,8 +25426,8 @@
         </p:blipFill>
         <p:spPr>
           <a:xfrm>
-            <a:off x="1893799" y="4247388"/>
-            <a:ext cx="854507" cy="854507"/>
+            <a:off x="1832762" y="4247388"/>
+            <a:ext cx="976579" cy="976579"/>
           </a:xfrm>
           <a:prstGeom prst="rect">
             <a:avLst/>
@@ -24814,8 +25442,8 @@
         </p:nvSpPr>
         <p:spPr>
           <a:xfrm>
-            <a:off x="548640" y="5120183"/>
-            <a:ext cx="3544824" cy="447599"/>
+            <a:off x="548640" y="5242255"/>
+            <a:ext cx="3544824" cy="406908"/>
           </a:xfrm>
           <a:prstGeom prst="rect">
             <a:avLst/>
@@ -24833,7 +25461,7 @@
               <a:buNone/>
             </a:pPr>
             <a:r>
-              <a:rPr lang="ko-KR" altLang="en-US" sz="2800" b="1" dirty="0">
+              <a:rPr lang="ko-KR" altLang="en-US" sz="2500" b="1" dirty="0">
                 <a:solidFill>
                   <a:srgbClr val="4236F6"/>
                 </a:solidFill>
@@ -24843,7 +25471,7 @@
               </a:rPr>
               <a:t>가방</a:t>
             </a:r>
-            <a:endParaRPr lang="en-US" sz="2800" dirty="0"/>
+            <a:endParaRPr lang="en-US" sz="2500" dirty="0"/>
           </a:p>
         </p:txBody>
       </p:sp>
@@ -24855,8 +25483,8 @@
         </p:nvSpPr>
         <p:spPr>
           <a:xfrm>
-            <a:off x="621792" y="5567782"/>
-            <a:ext cx="3398520" cy="274320"/>
+            <a:off x="621792" y="5649163"/>
+            <a:ext cx="3398520" cy="449885"/>
           </a:xfrm>
           <a:prstGeom prst="rect">
             <a:avLst/>
@@ -24910,8 +25538,8 @@
         </p:blipFill>
         <p:spPr>
           <a:xfrm>
-            <a:off x="3654552" y="5751576"/>
-            <a:ext cx="329184" cy="329184"/>
+            <a:off x="3691128" y="4210812"/>
+            <a:ext cx="310896" cy="310896"/>
           </a:xfrm>
           <a:prstGeom prst="rect">
             <a:avLst/>
@@ -24968,8 +25596,8 @@
         </p:blipFill>
         <p:spPr>
           <a:xfrm>
-            <a:off x="5667223" y="4247388"/>
-            <a:ext cx="854507" cy="854507"/>
+            <a:off x="5606186" y="4247388"/>
+            <a:ext cx="976579" cy="976579"/>
           </a:xfrm>
           <a:prstGeom prst="rect">
             <a:avLst/>
@@ -24984,8 +25612,8 @@
         </p:nvSpPr>
         <p:spPr>
           <a:xfrm>
-            <a:off x="4322064" y="5120183"/>
-            <a:ext cx="3544824" cy="447599"/>
+            <a:off x="4322064" y="5242255"/>
+            <a:ext cx="3544824" cy="406908"/>
           </a:xfrm>
           <a:prstGeom prst="rect">
             <a:avLst/>
@@ -25003,7 +25631,7 @@
               <a:buNone/>
             </a:pPr>
             <a:r>
-              <a:rPr lang="ko-KR" altLang="en-US" sz="2800" b="1" dirty="0">
+              <a:rPr lang="ko-KR" altLang="en-US" sz="2500" b="1" dirty="0">
                 <a:solidFill>
                   <a:srgbClr val="4236F6"/>
                 </a:solidFill>
@@ -25013,7 +25641,7 @@
               </a:rPr>
               <a:t>휴대폰</a:t>
             </a:r>
-            <a:endParaRPr lang="en-US" sz="2800" dirty="0"/>
+            <a:endParaRPr lang="en-US" sz="2500" dirty="0"/>
           </a:p>
         </p:txBody>
       </p:sp>
@@ -25025,8 +25653,8 @@
         </p:nvSpPr>
         <p:spPr>
           <a:xfrm>
-            <a:off x="4395216" y="5567782"/>
-            <a:ext cx="3398520" cy="274320"/>
+            <a:off x="4395216" y="5649163"/>
+            <a:ext cx="3398520" cy="449885"/>
           </a:xfrm>
           <a:prstGeom prst="rect">
             <a:avLst/>
@@ -25080,8 +25708,8 @@
         </p:blipFill>
         <p:spPr>
           <a:xfrm>
-            <a:off x="7427976" y="5751576"/>
-            <a:ext cx="329184" cy="329184"/>
+            <a:off x="7464552" y="4210812"/>
+            <a:ext cx="310896" cy="310896"/>
           </a:xfrm>
           <a:prstGeom prst="rect">
             <a:avLst/>
@@ -25138,8 +25766,8 @@
         </p:blipFill>
         <p:spPr>
           <a:xfrm>
-            <a:off x="9440647" y="4247388"/>
-            <a:ext cx="854507" cy="854507"/>
+            <a:off x="9379610" y="4247388"/>
+            <a:ext cx="976579" cy="976579"/>
           </a:xfrm>
           <a:prstGeom prst="rect">
             <a:avLst/>
@@ -25154,8 +25782,8 @@
         </p:nvSpPr>
         <p:spPr>
           <a:xfrm>
-            <a:off x="8095488" y="5120183"/>
-            <a:ext cx="3544824" cy="447599"/>
+            <a:off x="8095488" y="5242255"/>
+            <a:ext cx="3544824" cy="406908"/>
           </a:xfrm>
           <a:prstGeom prst="rect">
             <a:avLst/>
@@ -25173,7 +25801,7 @@
               <a:buNone/>
             </a:pPr>
             <a:r>
-              <a:rPr lang="ko-KR" altLang="en-US" sz="2800" b="1" dirty="0">
+              <a:rPr lang="ko-KR" altLang="en-US" sz="2500" b="1" dirty="0">
                 <a:solidFill>
                   <a:srgbClr val="4236F6"/>
                 </a:solidFill>
@@ -25183,7 +25811,7 @@
               </a:rPr>
               <a:t>시계</a:t>
             </a:r>
-            <a:endParaRPr lang="en-US" sz="2800" dirty="0"/>
+            <a:endParaRPr lang="en-US" sz="2500" dirty="0"/>
           </a:p>
         </p:txBody>
       </p:sp>
@@ -25195,8 +25823,8 @@
         </p:nvSpPr>
         <p:spPr>
           <a:xfrm>
-            <a:off x="8168640" y="5567782"/>
-            <a:ext cx="3398520" cy="274320"/>
+            <a:off x="8168640" y="5649163"/>
+            <a:ext cx="3398520" cy="449885"/>
           </a:xfrm>
           <a:prstGeom prst="rect">
             <a:avLst/>
@@ -25250,8 +25878,8 @@
         </p:blipFill>
         <p:spPr>
           <a:xfrm>
-            <a:off x="11201400" y="5751576"/>
-            <a:ext cx="329184" cy="329184"/>
+            <a:off x="11237976" y="4210812"/>
+            <a:ext cx="310896" cy="310896"/>
           </a:xfrm>
           <a:prstGeom prst="rect">
             <a:avLst/>
@@ -25388,7 +26016,7 @@
         <p:spPr>
           <a:xfrm>
             <a:off x="548640" y="1325880"/>
-            <a:ext cx="11064240" cy="457200"/>
+            <a:ext cx="11091672" cy="457200"/>
           </a:xfrm>
           <a:prstGeom prst="rect">
             <a:avLst/>
@@ -25467,8 +26095,8 @@
         </p:blipFill>
         <p:spPr>
           <a:xfrm>
-            <a:off x="1893799" y="1984248"/>
-            <a:ext cx="854507" cy="854507"/>
+            <a:off x="1832762" y="1984248"/>
+            <a:ext cx="976579" cy="976579"/>
           </a:xfrm>
           <a:prstGeom prst="rect">
             <a:avLst/>
@@ -25483,8 +26111,8 @@
         </p:nvSpPr>
         <p:spPr>
           <a:xfrm>
-            <a:off x="548640" y="2857043"/>
-            <a:ext cx="3544824" cy="447599"/>
+            <a:off x="548640" y="2979115"/>
+            <a:ext cx="3544824" cy="406908"/>
           </a:xfrm>
           <a:prstGeom prst="rect">
             <a:avLst/>
@@ -25502,7 +26130,7 @@
               <a:buNone/>
             </a:pPr>
             <a:r>
-              <a:rPr lang="ko-KR" altLang="en-US" sz="2800" b="1" dirty="0">
+              <a:rPr lang="ko-KR" altLang="en-US" sz="2500" b="1" dirty="0">
                 <a:solidFill>
                   <a:srgbClr val="4236F6"/>
                 </a:solidFill>
@@ -25512,7 +26140,7 @@
               </a:rPr>
               <a:t>의자</a:t>
             </a:r>
-            <a:endParaRPr lang="en-US" sz="2800" dirty="0"/>
+            <a:endParaRPr lang="en-US" sz="2500" dirty="0"/>
           </a:p>
         </p:txBody>
       </p:sp>
@@ -25524,8 +26152,8 @@
         </p:nvSpPr>
         <p:spPr>
           <a:xfrm>
-            <a:off x="621792" y="3304642"/>
-            <a:ext cx="3398520" cy="274320"/>
+            <a:off x="621792" y="3386023"/>
+            <a:ext cx="3398520" cy="449885"/>
           </a:xfrm>
           <a:prstGeom prst="rect">
             <a:avLst/>
@@ -25579,8 +26207,8 @@
         </p:blipFill>
         <p:spPr>
           <a:xfrm>
-            <a:off x="3654552" y="3488436"/>
-            <a:ext cx="329184" cy="329184"/>
+            <a:off x="3691128" y="1947672"/>
+            <a:ext cx="310896" cy="310896"/>
           </a:xfrm>
           <a:prstGeom prst="rect">
             <a:avLst/>
@@ -25637,8 +26265,8 @@
         </p:blipFill>
         <p:spPr>
           <a:xfrm>
-            <a:off x="5667223" y="1984248"/>
-            <a:ext cx="854507" cy="854507"/>
+            <a:off x="5606186" y="1984248"/>
+            <a:ext cx="976579" cy="976579"/>
           </a:xfrm>
           <a:prstGeom prst="rect">
             <a:avLst/>
@@ -25653,8 +26281,8 @@
         </p:nvSpPr>
         <p:spPr>
           <a:xfrm>
-            <a:off x="4322064" y="2857043"/>
-            <a:ext cx="3544824" cy="447599"/>
+            <a:off x="4322064" y="2979115"/>
+            <a:ext cx="3544824" cy="406908"/>
           </a:xfrm>
           <a:prstGeom prst="rect">
             <a:avLst/>
@@ -25672,7 +26300,7 @@
               <a:buNone/>
             </a:pPr>
             <a:r>
-              <a:rPr lang="ko-KR" altLang="en-US" sz="2800" b="1" dirty="0">
+              <a:rPr lang="ko-KR" altLang="en-US" sz="2500" b="1" dirty="0">
                 <a:solidFill>
                   <a:srgbClr val="4236F6"/>
                 </a:solidFill>
@@ -25682,7 +26310,7 @@
               </a:rPr>
               <a:t>책상</a:t>
             </a:r>
-            <a:endParaRPr lang="en-US" sz="2800" dirty="0"/>
+            <a:endParaRPr lang="en-US" sz="2500" dirty="0"/>
           </a:p>
         </p:txBody>
       </p:sp>
@@ -25694,7 +26322,7 @@
         </p:nvSpPr>
         <p:spPr>
           <a:xfrm>
-            <a:off x="4322064" y="3304642"/>
+            <a:off x="4322064" y="3386023"/>
             <a:ext cx="3544824" cy="274320"/>
           </a:xfrm>
           <a:prstGeom prst="rect">
@@ -25743,7 +26371,7 @@
         </p:nvSpPr>
         <p:spPr>
           <a:xfrm>
-            <a:off x="4395216" y="3578962"/>
+            <a:off x="4395216" y="3660343"/>
             <a:ext cx="3398520" cy="274320"/>
           </a:xfrm>
           <a:prstGeom prst="rect">
@@ -25798,8 +26426,8 @@
         </p:blipFill>
         <p:spPr>
           <a:xfrm>
-            <a:off x="7427976" y="3488436"/>
-            <a:ext cx="329184" cy="329184"/>
+            <a:off x="7464552" y="1947672"/>
+            <a:ext cx="310896" cy="310896"/>
           </a:xfrm>
           <a:prstGeom prst="rect">
             <a:avLst/>
@@ -25856,8 +26484,8 @@
         </p:blipFill>
         <p:spPr>
           <a:xfrm>
-            <a:off x="9440647" y="1984248"/>
-            <a:ext cx="854507" cy="854507"/>
+            <a:off x="9379610" y="1984248"/>
+            <a:ext cx="976579" cy="976579"/>
           </a:xfrm>
           <a:prstGeom prst="rect">
             <a:avLst/>
@@ -25872,8 +26500,8 @@
         </p:nvSpPr>
         <p:spPr>
           <a:xfrm>
-            <a:off x="8095488" y="2857043"/>
-            <a:ext cx="3544824" cy="447599"/>
+            <a:off x="8095488" y="2979115"/>
+            <a:ext cx="3544824" cy="406908"/>
           </a:xfrm>
           <a:prstGeom prst="rect">
             <a:avLst/>
@@ -25891,7 +26519,7 @@
               <a:buNone/>
             </a:pPr>
             <a:r>
-              <a:rPr lang="ko-KR" altLang="en-US" sz="2800" b="1" dirty="0">
+              <a:rPr lang="ko-KR" altLang="en-US" sz="2500" b="1" dirty="0">
                 <a:solidFill>
                   <a:srgbClr val="4236F6"/>
                 </a:solidFill>
@@ -25901,7 +26529,7 @@
               </a:rPr>
               <a:t>우산</a:t>
             </a:r>
-            <a:endParaRPr lang="en-US" sz="2800" dirty="0"/>
+            <a:endParaRPr lang="en-US" sz="2500" dirty="0"/>
           </a:p>
         </p:txBody>
       </p:sp>
@@ -25913,8 +26541,8 @@
         </p:nvSpPr>
         <p:spPr>
           <a:xfrm>
-            <a:off x="8168640" y="3304642"/>
-            <a:ext cx="3398520" cy="274320"/>
+            <a:off x="8168640" y="3386023"/>
+            <a:ext cx="3398520" cy="449885"/>
           </a:xfrm>
           <a:prstGeom prst="rect">
             <a:avLst/>
@@ -25968,8 +26596,8 @@
         </p:blipFill>
         <p:spPr>
           <a:xfrm>
-            <a:off x="11201400" y="3488436"/>
-            <a:ext cx="329184" cy="329184"/>
+            <a:off x="11237976" y="1947672"/>
+            <a:ext cx="310896" cy="310896"/>
           </a:xfrm>
           <a:prstGeom prst="rect">
             <a:avLst/>
@@ -26026,8 +26654,8 @@
         </p:blipFill>
         <p:spPr>
           <a:xfrm>
-            <a:off x="1893799" y="4247388"/>
-            <a:ext cx="854507" cy="854507"/>
+            <a:off x="1832762" y="4247388"/>
+            <a:ext cx="976579" cy="976579"/>
           </a:xfrm>
           <a:prstGeom prst="rect">
             <a:avLst/>
@@ -26042,8 +26670,8 @@
         </p:nvSpPr>
         <p:spPr>
           <a:xfrm>
-            <a:off x="548640" y="5120183"/>
-            <a:ext cx="3544824" cy="447599"/>
+            <a:off x="548640" y="5242255"/>
+            <a:ext cx="3544824" cy="406908"/>
           </a:xfrm>
           <a:prstGeom prst="rect">
             <a:avLst/>
@@ -26061,7 +26689,7 @@
               <a:buNone/>
             </a:pPr>
             <a:r>
-              <a:rPr lang="ko-KR" altLang="en-US" sz="2800" b="1" dirty="0">
+              <a:rPr lang="ko-KR" altLang="en-US" sz="2500" b="1" dirty="0">
                 <a:solidFill>
                   <a:srgbClr val="4236F6"/>
                 </a:solidFill>
@@ -26071,7 +26699,7 @@
               </a:rPr>
               <a:t>컵</a:t>
             </a:r>
-            <a:endParaRPr lang="en-US" sz="2800" dirty="0"/>
+            <a:endParaRPr lang="en-US" sz="2500" dirty="0"/>
           </a:p>
         </p:txBody>
       </p:sp>
@@ -26083,8 +26711,8 @@
         </p:nvSpPr>
         <p:spPr>
           <a:xfrm>
-            <a:off x="621792" y="5567782"/>
-            <a:ext cx="3398520" cy="274320"/>
+            <a:off x="621792" y="5649163"/>
+            <a:ext cx="3398520" cy="449885"/>
           </a:xfrm>
           <a:prstGeom prst="rect">
             <a:avLst/>
@@ -26138,8 +26766,8 @@
         </p:blipFill>
         <p:spPr>
           <a:xfrm>
-            <a:off x="3654552" y="5751576"/>
-            <a:ext cx="329184" cy="329184"/>
+            <a:off x="3691128" y="4210812"/>
+            <a:ext cx="310896" cy="310896"/>
           </a:xfrm>
           <a:prstGeom prst="rect">
             <a:avLst/>
@@ -26196,8 +26824,8 @@
         </p:blipFill>
         <p:spPr>
           <a:xfrm>
-            <a:off x="5667223" y="4247388"/>
-            <a:ext cx="854507" cy="854507"/>
+            <a:off x="5606186" y="4247388"/>
+            <a:ext cx="976579" cy="976579"/>
           </a:xfrm>
           <a:prstGeom prst="rect">
             <a:avLst/>
@@ -26212,8 +26840,8 @@
         </p:nvSpPr>
         <p:spPr>
           <a:xfrm>
-            <a:off x="4322064" y="5120183"/>
-            <a:ext cx="3544824" cy="447599"/>
+            <a:off x="4322064" y="5242255"/>
+            <a:ext cx="3544824" cy="406908"/>
           </a:xfrm>
           <a:prstGeom prst="rect">
             <a:avLst/>
@@ -26231,7 +26859,7 @@
               <a:buNone/>
             </a:pPr>
             <a:r>
-              <a:rPr lang="ko-KR" altLang="en-US" sz="2800" b="1" dirty="0">
+              <a:rPr lang="ko-KR" altLang="en-US" sz="2500" b="1" dirty="0">
                 <a:solidFill>
                   <a:srgbClr val="4236F6"/>
                 </a:solidFill>
@@ -26241,7 +26869,7 @@
               </a:rPr>
               <a:t>안경</a:t>
             </a:r>
-            <a:endParaRPr lang="en-US" sz="2800" dirty="0"/>
+            <a:endParaRPr lang="en-US" sz="2500" dirty="0"/>
           </a:p>
         </p:txBody>
       </p:sp>
@@ -26253,8 +26881,8 @@
         </p:nvSpPr>
         <p:spPr>
           <a:xfrm>
-            <a:off x="4395216" y="5567782"/>
-            <a:ext cx="3398520" cy="274320"/>
+            <a:off x="4395216" y="5649163"/>
+            <a:ext cx="3398520" cy="449885"/>
           </a:xfrm>
           <a:prstGeom prst="rect">
             <a:avLst/>
@@ -26308,8 +26936,8 @@
         </p:blipFill>
         <p:spPr>
           <a:xfrm>
-            <a:off x="7427976" y="5751576"/>
-            <a:ext cx="329184" cy="329184"/>
+            <a:off x="7464552" y="4210812"/>
+            <a:ext cx="310896" cy="310896"/>
           </a:xfrm>
           <a:prstGeom prst="rect">
             <a:avLst/>
@@ -26366,8 +26994,8 @@
         </p:blipFill>
         <p:spPr>
           <a:xfrm>
-            <a:off x="9440647" y="4247388"/>
-            <a:ext cx="854507" cy="854507"/>
+            <a:off x="9379610" y="4247388"/>
+            <a:ext cx="976579" cy="976579"/>
           </a:xfrm>
           <a:prstGeom prst="rect">
             <a:avLst/>
@@ -26382,8 +27010,8 @@
         </p:nvSpPr>
         <p:spPr>
           <a:xfrm>
-            <a:off x="8095488" y="5120183"/>
-            <a:ext cx="3544824" cy="447599"/>
+            <a:off x="8095488" y="5242255"/>
+            <a:ext cx="3544824" cy="406908"/>
           </a:xfrm>
           <a:prstGeom prst="rect">
             <a:avLst/>
@@ -26401,7 +27029,7 @@
               <a:buNone/>
             </a:pPr>
             <a:r>
-              <a:rPr lang="ko-KR" altLang="en-US" sz="2800" b="1" dirty="0">
+              <a:rPr lang="ko-KR" altLang="en-US" sz="2500" b="1" dirty="0">
                 <a:solidFill>
                   <a:srgbClr val="4236F6"/>
                 </a:solidFill>
@@ -26411,7 +27039,7 @@
               </a:rPr>
               <a:t>열쇠</a:t>
             </a:r>
-            <a:endParaRPr lang="en-US" sz="2800" dirty="0"/>
+            <a:endParaRPr lang="en-US" sz="2500" dirty="0"/>
           </a:p>
         </p:txBody>
       </p:sp>
@@ -26423,8 +27051,8 @@
         </p:nvSpPr>
         <p:spPr>
           <a:xfrm>
-            <a:off x="8168640" y="5567782"/>
-            <a:ext cx="3398520" cy="274320"/>
+            <a:off x="8168640" y="5649163"/>
+            <a:ext cx="3398520" cy="449885"/>
           </a:xfrm>
           <a:prstGeom prst="rect">
             <a:avLst/>
@@ -26478,8 +27106,8 @@
         </p:blipFill>
         <p:spPr>
           <a:xfrm>
-            <a:off x="11201400" y="5751576"/>
-            <a:ext cx="329184" cy="329184"/>
+            <a:off x="11237976" y="4210812"/>
+            <a:ext cx="310896" cy="310896"/>
           </a:xfrm>
           <a:prstGeom prst="rect">
             <a:avLst/>
@@ -26616,7 +27244,7 @@
         <p:spPr>
           <a:xfrm>
             <a:off x="548640" y="1325880"/>
-            <a:ext cx="11064240" cy="457200"/>
+            <a:ext cx="11091672" cy="457200"/>
           </a:xfrm>
           <a:prstGeom prst="rect">
             <a:avLst/>
@@ -26695,8 +27323,8 @@
         </p:blipFill>
         <p:spPr>
           <a:xfrm>
-            <a:off x="1418539" y="1984248"/>
-            <a:ext cx="1805026" cy="1805026"/>
+            <a:off x="1289609" y="1984248"/>
+            <a:ext cx="2062886" cy="2062886"/>
           </a:xfrm>
           <a:prstGeom prst="rect">
             <a:avLst/>
@@ -26711,8 +27339,8 @@
         </p:nvSpPr>
         <p:spPr>
           <a:xfrm>
-            <a:off x="548640" y="3807562"/>
-            <a:ext cx="3544824" cy="945490"/>
+            <a:off x="548640" y="4065422"/>
+            <a:ext cx="3544824" cy="859536"/>
           </a:xfrm>
           <a:prstGeom prst="rect">
             <a:avLst/>
@@ -26752,8 +27380,8 @@
         </p:nvSpPr>
         <p:spPr>
           <a:xfrm>
-            <a:off x="621792" y="4753051"/>
-            <a:ext cx="3398520" cy="1007669"/>
+            <a:off x="621792" y="4924958"/>
+            <a:ext cx="3398520" cy="1174090"/>
           </a:xfrm>
           <a:prstGeom prst="rect">
             <a:avLst/>
@@ -26807,8 +27435,8 @@
         </p:blipFill>
         <p:spPr>
           <a:xfrm>
-            <a:off x="3654552" y="5751576"/>
-            <a:ext cx="329184" cy="329184"/>
+            <a:off x="3691128" y="1947672"/>
+            <a:ext cx="310896" cy="310896"/>
           </a:xfrm>
           <a:prstGeom prst="rect">
             <a:avLst/>
@@ -26865,8 +27493,8 @@
         </p:blipFill>
         <p:spPr>
           <a:xfrm>
-            <a:off x="5191963" y="1984248"/>
-            <a:ext cx="1805026" cy="1805026"/>
+            <a:off x="5063033" y="1984248"/>
+            <a:ext cx="2062886" cy="2062886"/>
           </a:xfrm>
           <a:prstGeom prst="rect">
             <a:avLst/>
@@ -26881,8 +27509,8 @@
         </p:nvSpPr>
         <p:spPr>
           <a:xfrm>
-            <a:off x="4322064" y="3807562"/>
-            <a:ext cx="3544824" cy="945490"/>
+            <a:off x="4322064" y="4065422"/>
+            <a:ext cx="3544824" cy="859536"/>
           </a:xfrm>
           <a:prstGeom prst="rect">
             <a:avLst/>
@@ -26922,8 +27550,8 @@
         </p:nvSpPr>
         <p:spPr>
           <a:xfrm>
-            <a:off x="4395216" y="4753051"/>
-            <a:ext cx="3398520" cy="1007669"/>
+            <a:off x="4395216" y="4924958"/>
+            <a:ext cx="3398520" cy="1174090"/>
           </a:xfrm>
           <a:prstGeom prst="rect">
             <a:avLst/>
@@ -26977,8 +27605,8 @@
         </p:blipFill>
         <p:spPr>
           <a:xfrm>
-            <a:off x="7427976" y="5751576"/>
-            <a:ext cx="329184" cy="329184"/>
+            <a:off x="7464552" y="1947672"/>
+            <a:ext cx="310896" cy="310896"/>
           </a:xfrm>
           <a:prstGeom prst="rect">
             <a:avLst/>
@@ -27035,8 +27663,8 @@
         </p:blipFill>
         <p:spPr>
           <a:xfrm>
-            <a:off x="8965387" y="1984248"/>
-            <a:ext cx="1805026" cy="1805026"/>
+            <a:off x="8836457" y="1984248"/>
+            <a:ext cx="2062886" cy="2062886"/>
           </a:xfrm>
           <a:prstGeom prst="rect">
             <a:avLst/>
@@ -27051,8 +27679,8 @@
         </p:nvSpPr>
         <p:spPr>
           <a:xfrm>
-            <a:off x="8095488" y="3807562"/>
-            <a:ext cx="3544824" cy="945490"/>
+            <a:off x="8095488" y="4065422"/>
+            <a:ext cx="3544824" cy="859536"/>
           </a:xfrm>
           <a:prstGeom prst="rect">
             <a:avLst/>
@@ -27092,8 +27720,8 @@
         </p:nvSpPr>
         <p:spPr>
           <a:xfrm>
-            <a:off x="8168640" y="4753051"/>
-            <a:ext cx="3398520" cy="1007669"/>
+            <a:off x="8168640" y="4924958"/>
+            <a:ext cx="3398520" cy="1174090"/>
           </a:xfrm>
           <a:prstGeom prst="rect">
             <a:avLst/>
@@ -27147,8 +27775,8 @@
         </p:blipFill>
         <p:spPr>
           <a:xfrm>
-            <a:off x="11201400" y="5751576"/>
-            <a:ext cx="329184" cy="329184"/>
+            <a:off x="11237976" y="1947672"/>
+            <a:ext cx="310896" cy="310896"/>
           </a:xfrm>
           <a:prstGeom prst="rect">
             <a:avLst/>
@@ -27334,7 +27962,7 @@
         <p:spPr>
           <a:xfrm>
             <a:off x="548640" y="1325880"/>
-            <a:ext cx="11064240" cy="457200"/>
+            <a:ext cx="11091672" cy="457200"/>
           </a:xfrm>
           <a:prstGeom prst="rect">
             <a:avLst/>
@@ -27439,15 +28067,39 @@
           </a:p>
         </p:txBody>
       </p:sp>
-      <p:sp>
-        <p:nvSpPr>
-          <p:cNvPr id="6" name="Text 4"/>
+      <p:pic>
+        <p:nvPicPr>
+          <p:cNvPr id="6" name="col_img_0" descr="C:\Users\Chingu\AppData\Local\Temp\claude\C--Users-Chingu-Desktop-ACADEMIASEULWEB\d4111e1b-5523-44ea-97b2-b1a1d9545b9e\scratchpad\decks\cache\img_2d5bf76f71eb7dbb.png"/>
+          <p:cNvPicPr>
+            <a:picLocks noChangeAspect="1"/>
+          </p:cNvPicPr>
+          <p:nvPr/>
+        </p:nvPicPr>
+        <p:blipFill>
+          <a:blip r:embed="rId3"/>
+          <a:stretch>
+            <a:fillRect/>
+          </a:stretch>
+        </p:blipFill>
+        <p:spPr>
+          <a:xfrm>
+            <a:off x="1031596" y="2651760"/>
+            <a:ext cx="2517953" cy="1144524"/>
+          </a:xfrm>
+          <a:prstGeom prst="rect">
+            <a:avLst/>
+          </a:prstGeom>
+        </p:spPr>
+      </p:pic>
+      <p:sp>
+        <p:nvSpPr>
+          <p:cNvPr id="7" name="Text 4"/>
           <p:cNvSpPr txBox="1"/>
           <p:nvPr/>
         </p:nvSpPr>
         <p:spPr>
           <a:xfrm>
-            <a:off x="777240" y="2651760"/>
+            <a:off x="777240" y="3887724"/>
             <a:ext cx="3026664" cy="914400"/>
           </a:xfrm>
           <a:prstGeom prst="rect">
@@ -27482,14 +28134,14 @@
       </p:sp>
       <p:sp>
         <p:nvSpPr>
-          <p:cNvPr id="7" name="lista"/>
+          <p:cNvPr id="8" name="lista"/>
           <p:cNvSpPr txBox="1"/>
           <p:nvPr/>
         </p:nvSpPr>
         <p:spPr>
           <a:xfrm>
-            <a:off x="731520" y="3657600"/>
-            <a:ext cx="3118104" cy="2377440"/>
+            <a:off x="731520" y="4893564"/>
+            <a:ext cx="3118104" cy="1141476"/>
           </a:xfrm>
           <a:prstGeom prst="rect">
             <a:avLst/>
@@ -27560,7 +28212,7 @@
       </p:sp>
       <p:sp>
         <p:nvSpPr>
-          <p:cNvPr id="8" name="col_1"/>
+          <p:cNvPr id="9" name="col_1"/>
           <p:cNvSpPr/>
           <p:nvPr/>
         </p:nvSpPr>
@@ -27587,7 +28239,7 @@
       </p:sp>
       <p:sp>
         <p:nvSpPr>
-          <p:cNvPr id="9" name="Text 7"/>
+          <p:cNvPr id="10" name="Text 7"/>
           <p:cNvSpPr txBox="1"/>
           <p:nvPr/>
         </p:nvSpPr>
@@ -27623,15 +28275,39 @@
           </a:p>
         </p:txBody>
       </p:sp>
-      <p:sp>
-        <p:nvSpPr>
-          <p:cNvPr id="10" name="Text 8"/>
+      <p:pic>
+        <p:nvPicPr>
+          <p:cNvPr id="11" name="col_img_1" descr="C:\Users\Chingu\AppData\Local\Temp\claude\C--Users-Chingu-Desktop-ACADEMIASEULWEB\d4111e1b-5523-44ea-97b2-b1a1d9545b9e\scratchpad\decks\cache\img_265fec8363d5be02.png"/>
+          <p:cNvPicPr>
+            <a:picLocks noChangeAspect="1"/>
+          </p:cNvPicPr>
+          <p:nvPr/>
+        </p:nvPicPr>
+        <p:blipFill>
+          <a:blip r:embed="rId4"/>
+          <a:stretch>
+            <a:fillRect/>
+          </a:stretch>
+        </p:blipFill>
+        <p:spPr>
+          <a:xfrm>
+            <a:off x="4835500" y="2651760"/>
+            <a:ext cx="2517953" cy="1144524"/>
+          </a:xfrm>
+          <a:prstGeom prst="rect">
+            <a:avLst/>
+          </a:prstGeom>
+        </p:spPr>
+      </p:pic>
+      <p:sp>
+        <p:nvSpPr>
+          <p:cNvPr id="12" name="Text 8"/>
           <p:cNvSpPr txBox="1"/>
           <p:nvPr/>
         </p:nvSpPr>
         <p:spPr>
           <a:xfrm>
-            <a:off x="4581144" y="2651760"/>
+            <a:off x="4581144" y="3887724"/>
             <a:ext cx="3026664" cy="914400"/>
           </a:xfrm>
           <a:prstGeom prst="rect">
@@ -27666,14 +28342,14 @@
       </p:sp>
       <p:sp>
         <p:nvSpPr>
-          <p:cNvPr id="11" name="lista"/>
+          <p:cNvPr id="13" name="lista"/>
           <p:cNvSpPr txBox="1"/>
           <p:nvPr/>
         </p:nvSpPr>
         <p:spPr>
           <a:xfrm>
-            <a:off x="4535424" y="3657600"/>
-            <a:ext cx="3118104" cy="2377440"/>
+            <a:off x="4535424" y="4893564"/>
+            <a:ext cx="3118104" cy="1141476"/>
           </a:xfrm>
           <a:prstGeom prst="rect">
             <a:avLst/>
@@ -27744,7 +28420,7 @@
       </p:sp>
       <p:sp>
         <p:nvSpPr>
-          <p:cNvPr id="12" name="col_2"/>
+          <p:cNvPr id="14" name="col_2"/>
           <p:cNvSpPr/>
           <p:nvPr/>
         </p:nvSpPr>
@@ -27771,7 +28447,7 @@
       </p:sp>
       <p:sp>
         <p:nvSpPr>
-          <p:cNvPr id="13" name="Text 11"/>
+          <p:cNvPr id="15" name="Text 11"/>
           <p:cNvSpPr txBox="1"/>
           <p:nvPr/>
         </p:nvSpPr>
@@ -27807,15 +28483,39 @@
           </a:p>
         </p:txBody>
       </p:sp>
-      <p:sp>
-        <p:nvSpPr>
-          <p:cNvPr id="14" name="Text 12"/>
+      <p:pic>
+        <p:nvPicPr>
+          <p:cNvPr id="16" name="col_img_2" descr="C:\Users\Chingu\AppData\Local\Temp\claude\C--Users-Chingu-Desktop-ACADEMIASEULWEB\d4111e1b-5523-44ea-97b2-b1a1d9545b9e\scratchpad\decks\cache\img_e29ce44e0ad03168.png"/>
+          <p:cNvPicPr>
+            <a:picLocks noChangeAspect="1"/>
+          </p:cNvPicPr>
+          <p:nvPr/>
+        </p:nvPicPr>
+        <p:blipFill>
+          <a:blip r:embed="rId5"/>
+          <a:stretch>
+            <a:fillRect/>
+          </a:stretch>
+        </p:blipFill>
+        <p:spPr>
+          <a:xfrm>
+            <a:off x="8946185" y="2651760"/>
+            <a:ext cx="1904390" cy="865632"/>
+          </a:xfrm>
+          <a:prstGeom prst="rect">
+            <a:avLst/>
+          </a:prstGeom>
+        </p:spPr>
+      </p:pic>
+      <p:sp>
+        <p:nvSpPr>
+          <p:cNvPr id="17" name="Text 12"/>
           <p:cNvSpPr txBox="1"/>
           <p:nvPr/>
         </p:nvSpPr>
         <p:spPr>
           <a:xfrm>
-            <a:off x="8385048" y="2651760"/>
+            <a:off x="8385048" y="3608832"/>
             <a:ext cx="3026664" cy="914400"/>
           </a:xfrm>
           <a:prstGeom prst="rect">
@@ -27850,14 +28550,14 @@
       </p:sp>
       <p:sp>
         <p:nvSpPr>
-          <p:cNvPr id="15" name="lista"/>
+          <p:cNvPr id="18" name="lista"/>
           <p:cNvSpPr txBox="1"/>
           <p:nvPr/>
         </p:nvSpPr>
         <p:spPr>
           <a:xfrm>
-            <a:off x="8339328" y="3657600"/>
-            <a:ext cx="3118104" cy="2377440"/>
+            <a:off x="8339328" y="4614672"/>
+            <a:ext cx="3118104" cy="1420368"/>
           </a:xfrm>
           <a:prstGeom prst="rect">
             <a:avLst/>

--- a/Curriculo/Fase2_Basico1/decks/Basico1_S03_Kiran.pptx
+++ b/Curriculo/Fase2_Basico1/decks/Basico1_S03_Kiran.pptx
@@ -136,7 +136,7 @@
   <p:extLst>
     <p:ext uri="{521415D9-36F7-43E2-AB2F-B90AF26B5E84}">
       <p14:sectionLst xmlns:p14="http://schemas.microsoft.com/office/powerpoint/2010/main">
-        <p14:section name="Semana 3" id="{9732B14D-A20E-277B-CB84-AEDA3E54A9C9}">
+        <p14:section name="Semana 3" id="{41C0E340-D174-B6F4-645B-3F3A3474D095}">
           <p14:sldIdLst>
             <p14:sldId id="256"/>
             <p14:sldId id="257"/>
@@ -204,7 +204,7 @@
     </p:spTree>
     <p:extLst>
       <p:ext uri="{BB962C8B-B14F-4D97-AF65-F5344CB8AC3E}">
-        <p14:creationId xmlns:p14="http://schemas.microsoft.com/office/powerpoint/2010/main" val="3738085940"/>
+        <p14:creationId xmlns:p14="http://schemas.microsoft.com/office/powerpoint/2010/main" val="3728518893"/>
       </p:ext>
     </p:extLst>
   </p:cSld>
@@ -350,7 +350,7 @@
           <a:p>
             <a:r>
               <a:rPr lang="en-US" dirty="0"/>
-              <a:t>20:00–20:01. Inicia la grabación en la nube (Basico1-Martes_S03_2026-10-27 o Basico1-Jueves_S03_2026-10-29) y comparte el deck. Saluda con una leve inclinación: «안녕하세요!» y espera que el grupo responda con cámara. En español: «¡Bienvenidos a la semana 3! La semana pasada aprendimos a presentarnos. Hoy empezamos a preguntar por todo lo que nos rodea. Pero primero, el quiz: 3 minutos, 5 respuestas, en un solo mensaje privado para mí.»
+              <a:t>20:00–20:01. Inicia la grabación en la nube (Basico1-Martes_S03_2026-11-03 o Basico1-Jueves_S03_2026-11-05) y comparte el deck. Saluda con una leve inclinación: «안녕하세요!» y espera que el grupo responda con cámara. Recuerda que en EE.UU. cambió la hora el domingo 1 de noviembre (EE.UU. Este: 18:00). En español: «¡Bienvenidos a la semana 3! La semana pasada aprendimos a presentarnos. Hoy empezamos a preguntar por todo lo que nos rodea. Pero primero, el quiz: 3 minutos, 5 respuestas, en un solo mensaje privado para mí.»
 Fuente: S03 C.14 L1 · B 20:00 · C.3 Bloque 0
 Lámina 1</a:t>
             </a:r>
@@ -4058,7 +4058,7 @@
                   <a:srgbClr val="E8B84B"/>
                 </a:solidFill>
               </a:rPr>
-              <a:t>) · mar 27 / jue 29 oct</a:t>
+              <a:t>) · mar 3 / jue 5 nov</a:t>
             </a:r>
             <a:endParaRPr lang="en-US" sz="2200" dirty="0"/>
           </a:p>
@@ -7019,7 +7019,7 @@
           <p:nvPr>
             <p:extLst>
               <p:ext uri="{D42A27DB-BD31-4B8C-83A1-F6EECF244321}">
-                <p14:modId xmlns:p14="http://schemas.microsoft.com/office/powerpoint/2010/main" val="2566336840"/>
+                <p14:modId xmlns:p14="http://schemas.microsoft.com/office/powerpoint/2010/main" val="3994266940"/>
               </p:ext>
             </p:extLst>
           </p:nvPr>
@@ -16294,7 +16294,7 @@
           <p:nvPr>
             <p:extLst>
               <p:ext uri="{D42A27DB-BD31-4B8C-83A1-F6EECF244321}">
-                <p14:modId xmlns:p14="http://schemas.microsoft.com/office/powerpoint/2010/main" val="2117625437"/>
+                <p14:modId xmlns:p14="http://schemas.microsoft.com/office/powerpoint/2010/main" val="3610679448"/>
               </p:ext>
             </p:extLst>
           </p:nvPr>
@@ -17744,7 +17744,7 @@
           <p:nvPr>
             <p:extLst>
               <p:ext uri="{D42A27DB-BD31-4B8C-83A1-F6EECF244321}">
-                <p14:modId xmlns:p14="http://schemas.microsoft.com/office/powerpoint/2010/main" val="1502364788"/>
+                <p14:modId xmlns:p14="http://schemas.microsoft.com/office/powerpoint/2010/main" val="4128081384"/>
               </p:ext>
             </p:extLst>
           </p:nvPr>
@@ -21482,7 +21482,7 @@
                   <a:srgbClr val="4236F6"/>
                 </a:solidFill>
               </a:rPr>
-              <a:t>Entrega en el grupo de WhatsApp: mar 3 / jue 5 nov, 20:00 (hora de Chile)</a:t>
+              <a:t>Entrega en el grupo de WhatsApp: mar 10 / jue 12 nov, 20:00 (hora de Chile)</a:t>
             </a:r>
             <a:endParaRPr lang="en-US" sz="1800" dirty="0"/>
           </a:p>
@@ -23390,7 +23390,7 @@
           <p:nvPr>
             <p:extLst>
               <p:ext uri="{D42A27DB-BD31-4B8C-83A1-F6EECF244321}">
-                <p14:modId xmlns:p14="http://schemas.microsoft.com/office/powerpoint/2010/main" val="63512680"/>
+                <p14:modId xmlns:p14="http://schemas.microsoft.com/office/powerpoint/2010/main" val="3849636805"/>
               </p:ext>
             </p:extLst>
           </p:nvPr>
